--- a/10-Knowledge-Products/KP1-GEA/videos/module_5/en/decks/KP1_M5_5.4_Deck_v0.2.pptx
+++ b/10-Knowledge-Products/KP1-GEA/videos/module_5/en/decks/KP1_M5_5.4_Deck_v0.2.pptx
@@ -14,14 +14,14 @@
     <p:handoutMasterId r:id="rId47"/>
   </p:handoutMasterIdLst>
   <p:sldIdLst>
-    <p:sldId id="2681" r:id="rId8"/>
-    <p:sldId id="2716" r:id="rId38"/>
-    <p:sldId id="2717" r:id="rId39"/>
-    <p:sldId id="2718" r:id="rId40"/>
     <p:sldId id="2719" r:id="rId41"/>
     <p:sldId id="2720" r:id="rId42"/>
     <p:sldId id="2721" r:id="rId43"/>
     <p:sldId id="2722" r:id="rId44"/>
+    <p:sldId id="2723" r:id="rId45"/>
+    <p:sldId id="2724" r:id="rId17"/>
+    <p:sldId id="2725" r:id="rId16"/>
+    <p:sldId id="2726" r:id="rId15"/>
   </p:sldIdLst>
   <p:sldSz cx="12192000" cy="6858000"/>
   <p:notesSz cx="6858000" cy="9144000"/>
@@ -888,298 +888,6 @@
 </p:notesMaster>
 </file>
 
-<file path=ppt/notesSlides/notesSlide21.xml><?xml version="1.0" encoding="utf-8"?>
-<p:notes xmlns:a="http://schemas.openxmlformats.org/drawingml/2006/main" xmlns:p="http://schemas.openxmlformats.org/presentationml/2006/main" xmlns:r="http://schemas.openxmlformats.org/officeDocument/2006/relationships">
-  <p:cSld>
-    <p:spTree>
-      <p:nvGrpSpPr>
-        <p:cNvPr id="1" name=""/>
-        <p:cNvGrpSpPr/>
-        <p:nvPr/>
-      </p:nvGrpSpPr>
-      <p:grpSpPr>
-        <a:xfrm>
-          <a:off x="0" y="0"/>
-          <a:ext cx="0" cy="0"/>
-          <a:chOff x="0" y="0"/>
-          <a:chExt cx="0" cy="0"/>
-        </a:xfrm>
-      </p:grpSpPr>
-      <p:sp>
-        <p:nvSpPr>
-          <p:cNvPr id="2" name="Slide Image Placeholder 1"/>
-          <p:cNvSpPr>
-            <a:spLocks noGrp="1"/>
-          </p:cNvSpPr>
-          <p:nvPr>
-            <p:ph type="sldImg" idx="2"/>
-          </p:nvPr>
-        </p:nvSpPr>
-        <p:spPr/>
-      </p:sp>
-      <p:sp>
-        <p:nvSpPr>
-          <p:cNvPr id="3" name="Notes Placeholder 2"/>
-          <p:cNvSpPr>
-            <a:spLocks noGrp="1"/>
-          </p:cNvSpPr>
-          <p:nvPr>
-            <p:ph type="body" idx="3" sz="quarter"/>
-          </p:nvPr>
-        </p:nvSpPr>
-        <p:spPr/>
-        <p:txBody>
-          <a:bodyPr/>
-          <a:lstStyle/>
-          <a:p>
-            <a:r>
-              <a:t>Title card for standalone video 5.4. Content slides are identical to the corresponding section of the combined deck KP1_M5_Deck_v0.2.pptx; voice-over is in each slide’s notes.</a:t>
-            </a:r>
-          </a:p>
-        </p:txBody>
-      </p:sp>
-      <p:sp>
-        <p:nvSpPr>
-          <p:cNvPr id="4" name="Slide Number Placeholder 3"/>
-          <p:cNvSpPr>
-            <a:spLocks noGrp="1"/>
-          </p:cNvSpPr>
-          <p:nvPr>
-            <p:ph type="sldNum" idx="5" sz="quarter"/>
-          </p:nvPr>
-        </p:nvSpPr>
-        <p:spPr/>
-      </p:sp>
-    </p:spTree>
-  </p:cSld>
-  <p:clrMapOvr>
-    <a:masterClrMapping/>
-  </p:clrMapOvr>
-</p:notes>
-</file>
-
-<file path=ppt/notesSlides/notesSlide23.xml><?xml version="1.0" encoding="utf-8"?>
-<p:notes xmlns:a="http://schemas.openxmlformats.org/drawingml/2006/main" xmlns:p="http://schemas.openxmlformats.org/presentationml/2006/main" xmlns:r="http://schemas.openxmlformats.org/officeDocument/2006/relationships">
-  <p:cSld>
-    <p:spTree>
-      <p:nvGrpSpPr>
-        <p:cNvPr id="1" name=""/>
-        <p:cNvGrpSpPr/>
-        <p:nvPr/>
-      </p:nvGrpSpPr>
-      <p:grpSpPr>
-        <a:xfrm>
-          <a:off x="0" y="0"/>
-          <a:ext cx="0" cy="0"/>
-          <a:chOff x="0" y="0"/>
-          <a:chExt cx="0" cy="0"/>
-        </a:xfrm>
-      </p:grpSpPr>
-      <p:sp>
-        <p:nvSpPr>
-          <p:cNvPr id="2" name="Slide Image Placeholder 1"/>
-          <p:cNvSpPr>
-            <a:spLocks noGrp="1"/>
-          </p:cNvSpPr>
-          <p:nvPr>
-            <p:ph type="sldImg" idx="2"/>
-          </p:nvPr>
-        </p:nvSpPr>
-        <p:spPr/>
-      </p:sp>
-      <p:sp>
-        <p:nvSpPr>
-          <p:cNvPr id="3" name="Notes Placeholder 2"/>
-          <p:cNvSpPr>
-            <a:spLocks noGrp="1"/>
-          </p:cNvSpPr>
-          <p:nvPr>
-            <p:ph type="body" idx="3" sz="quarter"/>
-          </p:nvPr>
-        </p:nvSpPr>
-        <p:spPr/>
-        <p:txBody>
-          <a:bodyPr/>
-          <a:lstStyle/>
-          <a:p>
-            <a:r>
-              <a:t>VO, slide 1: The hardest step is getting your minister to commit the team, the mandate and the money. Ministers do not commit to architecture; they commit to numbers and to cases they can defend in cabinet. So bring three things: the saving, the proof, the honest cost.</a:t>
-            </a:r>
-          </a:p>
-          <a:p/>
-          <a:p>
-            <a:r>
-              <a:t>Retrieval prompt — ask before playing on: of everything in your case, what does a minister actually act on? Answer on the next slide.</a:t>
-            </a:r>
-          </a:p>
-        </p:txBody>
-      </p:sp>
-      <p:sp>
-        <p:nvSpPr>
-          <p:cNvPr id="4" name="Slide Number Placeholder 3"/>
-          <p:cNvSpPr>
-            <a:spLocks noGrp="1"/>
-          </p:cNvSpPr>
-          <p:nvPr>
-            <p:ph type="sldNum" idx="5" sz="quarter"/>
-          </p:nvPr>
-        </p:nvSpPr>
-        <p:spPr/>
-      </p:sp>
-    </p:spTree>
-  </p:cSld>
-  <p:clrMapOvr>
-    <a:masterClrMapping/>
-  </p:clrMapOvr>
-</p:notes>
-</file>
-
-<file path=ppt/notesSlides/notesSlide24.xml><?xml version="1.0" encoding="utf-8"?>
-<p:notes xmlns:a="http://schemas.openxmlformats.org/drawingml/2006/main" xmlns:p="http://schemas.openxmlformats.org/presentationml/2006/main" xmlns:r="http://schemas.openxmlformats.org/officeDocument/2006/relationships">
-  <p:cSld>
-    <p:spTree>
-      <p:nvGrpSpPr>
-        <p:cNvPr id="1" name=""/>
-        <p:cNvGrpSpPr/>
-        <p:nvPr/>
-      </p:nvGrpSpPr>
-      <p:grpSpPr>
-        <a:xfrm>
-          <a:off x="0" y="0"/>
-          <a:ext cx="0" cy="0"/>
-          <a:chOff x="0" y="0"/>
-          <a:chExt cx="0" cy="0"/>
-        </a:xfrm>
-      </p:grpSpPr>
-      <p:sp>
-        <p:nvSpPr>
-          <p:cNvPr id="2" name="Slide Image Placeholder 1"/>
-          <p:cNvSpPr>
-            <a:spLocks noGrp="1"/>
-          </p:cNvSpPr>
-          <p:nvPr>
-            <p:ph type="sldImg" idx="2"/>
-          </p:nvPr>
-        </p:nvSpPr>
-        <p:spPr/>
-      </p:sp>
-      <p:sp>
-        <p:nvSpPr>
-          <p:cNvPr id="3" name="Notes Placeholder 2"/>
-          <p:cNvSpPr>
-            <a:spLocks noGrp="1"/>
-          </p:cNvSpPr>
-          <p:nvPr>
-            <p:ph type="body" idx="3" sz="quarter"/>
-          </p:nvPr>
-        </p:nvSpPr>
-        <p:spPr/>
-        <p:txBody>
-          <a:bodyPr/>
-          <a:lstStyle/>
-          <a:p>
-            <a:r>
-              <a:t>VO: Lead with the saving, because that is what a minister can act on. The strongest number you have is the cost of fragmentation: every programme that builds its own identity, its own registry, its own integration, means the country pays many times for one thing. A whole-of-government business case shows that consuming shared building blocks instead would save a meaningful share of the sectoral digital budget over five years. That number — not the four-layer diagram — is what opens a cabinet conversation. The architecture is how you achieve the saving; the saving is what you sell.</a:t>
-            </a:r>
-          </a:p>
-          <a:p/>
-          <a:p>
-            <a:r>
-              <a:t>Production cue: the pivotal slide of this video, and it answers the retrieval prompt set on the title slide. Hold it a beat longer.</a:t>
-            </a:r>
-          </a:p>
-        </p:txBody>
-      </p:sp>
-      <p:sp>
-        <p:nvSpPr>
-          <p:cNvPr id="4" name="Slide Number Placeholder 3"/>
-          <p:cNvSpPr>
-            <a:spLocks noGrp="1"/>
-          </p:cNvSpPr>
-          <p:nvPr>
-            <p:ph type="sldNum" idx="5" sz="quarter"/>
-          </p:nvPr>
-        </p:nvSpPr>
-        <p:spPr/>
-      </p:sp>
-    </p:spTree>
-  </p:cSld>
-  <p:clrMapOvr>
-    <a:masterClrMapping/>
-  </p:clrMapOvr>
-</p:notes>
-</file>
-
-<file path=ppt/notesSlides/notesSlide25.xml><?xml version="1.0" encoding="utf-8"?>
-<p:notes xmlns:a="http://schemas.openxmlformats.org/drawingml/2006/main" xmlns:p="http://schemas.openxmlformats.org/presentationml/2006/main" xmlns:r="http://schemas.openxmlformats.org/officeDocument/2006/relationships">
-  <p:cSld>
-    <p:spTree>
-      <p:nvGrpSpPr>
-        <p:cNvPr id="1" name=""/>
-        <p:cNvGrpSpPr/>
-        <p:nvPr/>
-      </p:nvGrpSpPr>
-      <p:grpSpPr>
-        <a:xfrm>
-          <a:off x="0" y="0"/>
-          <a:ext cx="0" cy="0"/>
-          <a:chOff x="0" y="0"/>
-          <a:chExt cx="0" cy="0"/>
-        </a:xfrm>
-      </p:grpSpPr>
-      <p:sp>
-        <p:nvSpPr>
-          <p:cNvPr id="2" name="Slide Image Placeholder 1"/>
-          <p:cNvSpPr>
-            <a:spLocks noGrp="1"/>
-          </p:cNvSpPr>
-          <p:nvPr>
-            <p:ph type="sldImg" idx="2"/>
-          </p:nvPr>
-        </p:nvSpPr>
-        <p:spPr/>
-      </p:sp>
-      <p:sp>
-        <p:nvSpPr>
-          <p:cNvPr id="3" name="Notes Placeholder 2"/>
-          <p:cNvSpPr>
-            <a:spLocks noGrp="1"/>
-          </p:cNvSpPr>
-          <p:nvPr>
-            <p:ph type="body" idx="3" sz="quarter"/>
-          </p:nvPr>
-        </p:nvSpPr>
-        <p:spPr/>
-        <p:txBody>
-          <a:bodyPr/>
-          <a:lstStyle/>
-          <a:p>
-            <a:r>
-              <a:t>VO: Back the number with the proof, because a minister's first worry is risk. A saving that depends on an untested approach is easy to refuse. A saving backed by four governments that have already built the same pattern is much harder to wave away. So pair the business case with the evidence: this is not an experiment, it is a charted path that countries like yours have walked, with the obstacles documented. You are not asking the minister to bet on a theory. You are asking them to capture a saving that others have already proven is real.</a:t>
-            </a:r>
-          </a:p>
-        </p:txBody>
-      </p:sp>
-      <p:sp>
-        <p:nvSpPr>
-          <p:cNvPr id="4" name="Slide Number Placeholder 3"/>
-          <p:cNvSpPr>
-            <a:spLocks noGrp="1"/>
-          </p:cNvSpPr>
-          <p:nvPr>
-            <p:ph type="sldNum" idx="5" sz="quarter"/>
-          </p:nvPr>
-        </p:nvSpPr>
-        <p:spPr/>
-      </p:sp>
-    </p:spTree>
-  </p:cSld>
-  <p:clrMapOvr>
-    <a:masterClrMapping/>
-  </p:clrMapOvr>
-</p:notes>
-</file>
-
 <file path=ppt/notesSlides/notesSlide26.xml><?xml version="1.0" encoding="utf-8"?>
 <p:notes xmlns:a="http://schemas.openxmlformats.org/drawingml/2006/main" xmlns:p="http://schemas.openxmlformats.org/presentationml/2006/main" xmlns:r="http://schemas.openxmlformats.org/officeDocument/2006/relationships">
   <p:cSld>
@@ -1225,7 +933,7 @@
           <a:lstStyle/>
           <a:p>
             <a:r>
-              <a:t>VO: Then be honest about the cost and the time, because overselling loses the case the moment a sharp official tests it. Name the real cost: a small permanent team and governance, typically around two per cent of the digital-government budget, sustained for five years. And name the real horizon: about six months to a roadmap the minister can show, but years to full maturity — which means the minister who launches this will likely not be the one who completes it. Said as a weakness, that sinks the case. Said as the truth about serious institution-building, it is what separates a credible proposal from a salesman's. Ministers fund people who tell them the real timeline.</a:t>
+              <a:t>Title card — the cold open. The hosts name the module, the video number, the title and the single message on this slide; no scripted narration. Hold until the opener begins; the opener is narrated on the next slide.</a:t>
             </a:r>
           </a:p>
         </p:txBody>
@@ -1295,7 +1003,13 @@
           <a:lstStyle/>
           <a:p>
             <a:r>
-              <a:t>VO: Put it on one page, in that order. The saving — the country-level number over five years. The proof — the governments that have done it. The ask — a small permanent team, a board with real authority, around two per cent of the digital budget, and a promise to protect the team. And the horizon — six months to a roadmap, then a sustained practice. Saving, proof, ask, horizon. That single page turns a technical request the minister would defer into a business case they can defend in cabinet.</a:t>
+              <a:t>VO: The hardest step is getting your minister to commit the team, the mandate and the money. Ministers do not commit to architecture; they commit to numbers and to cases they can defend in cabinet. So bring three things: the saving, the proof, the honest cost.</a:t>
+            </a:r>
+          </a:p>
+          <a:p/>
+          <a:p>
+            <a:r>
+              <a:t>Retrieval prompt — ask before playing on: of everything in your case, what does a minister actually act on? Answer on the next slide.</a:t>
             </a:r>
           </a:p>
         </p:txBody>
@@ -1365,13 +1079,13 @@
           <a:lstStyle/>
           <a:p>
             <a:r>
-              <a:t>PRACTICE BOX (on-screen only — never read it, never paraphrase it, never point at it). It replaces the narrated handoff: this video ends on the recap and the Sources slide.</a:t>
+              <a:t>VO: Lead with the saving, because that is what a minister can act on. The strongest number you have is the cost of fragmentation: every programme that builds its own identity, its own registry, its own integration, means the country pays many times for one thing. A whole-of-government business case shows that consuming shared building blocks instead would save a meaningful share of the sectoral digital budget over five years. That number — not the four-layer diagram — is what opens a cabinet conversation. The architecture is how you achieve the saving; the saving is what you sell.</a:t>
             </a:r>
           </a:p>
           <a:p/>
           <a:p>
             <a:r>
-              <a:t>VO: Winning the commitment is not an architecture conversation. It is a one-page business case: the saving, the proof, the ask, the honest horizon. Bring that, and your minister can say yes and defend it.</a:t>
+              <a:t>Production cue: the pivotal slide of this video, and it answers the retrieval prompt set on the title slide. Hold it a beat longer.</a:t>
             </a:r>
           </a:p>
         </p:txBody>
@@ -1397,6 +1111,292 @@
 </file>
 
 <file path=ppt/notesSlides/notesSlide29.xml><?xml version="1.0" encoding="utf-8"?>
+<p:notes xmlns:a="http://schemas.openxmlformats.org/drawingml/2006/main" xmlns:p="http://schemas.openxmlformats.org/presentationml/2006/main" xmlns:r="http://schemas.openxmlformats.org/officeDocument/2006/relationships">
+  <p:cSld>
+    <p:spTree>
+      <p:nvGrpSpPr>
+        <p:cNvPr id="1" name=""/>
+        <p:cNvGrpSpPr/>
+        <p:nvPr/>
+      </p:nvGrpSpPr>
+      <p:grpSpPr>
+        <a:xfrm>
+          <a:off x="0" y="0"/>
+          <a:ext cx="0" cy="0"/>
+          <a:chOff x="0" y="0"/>
+          <a:chExt cx="0" cy="0"/>
+        </a:xfrm>
+      </p:grpSpPr>
+      <p:sp>
+        <p:nvSpPr>
+          <p:cNvPr id="2" name="Slide Image Placeholder 1"/>
+          <p:cNvSpPr>
+            <a:spLocks noGrp="1"/>
+          </p:cNvSpPr>
+          <p:nvPr>
+            <p:ph type="sldImg" idx="2"/>
+          </p:nvPr>
+        </p:nvSpPr>
+        <p:spPr/>
+      </p:sp>
+      <p:sp>
+        <p:nvSpPr>
+          <p:cNvPr id="3" name="Notes Placeholder 2"/>
+          <p:cNvSpPr>
+            <a:spLocks noGrp="1"/>
+          </p:cNvSpPr>
+          <p:nvPr>
+            <p:ph type="body" idx="3" sz="quarter"/>
+          </p:nvPr>
+        </p:nvSpPr>
+        <p:spPr/>
+        <p:txBody>
+          <a:bodyPr/>
+          <a:lstStyle/>
+          <a:p>
+            <a:r>
+              <a:t>VO: Back the number with the proof, because a minister's first worry is risk. A saving that depends on an untested approach is easy to refuse. A saving backed by four governments that have already built the same pattern is much harder to wave away. So pair the business case with the evidence: this is not an experiment, it is a charted path that countries like yours have walked, with the obstacles documented. You are not asking the minister to bet on a theory. You are asking them to capture a saving that others have already proven is real.</a:t>
+            </a:r>
+          </a:p>
+        </p:txBody>
+      </p:sp>
+      <p:sp>
+        <p:nvSpPr>
+          <p:cNvPr id="4" name="Slide Number Placeholder 3"/>
+          <p:cNvSpPr>
+            <a:spLocks noGrp="1"/>
+          </p:cNvSpPr>
+          <p:nvPr>
+            <p:ph type="sldNum" idx="5" sz="quarter"/>
+          </p:nvPr>
+        </p:nvSpPr>
+        <p:spPr/>
+      </p:sp>
+    </p:spTree>
+  </p:cSld>
+  <p:clrMapOvr>
+    <a:masterClrMapping/>
+  </p:clrMapOvr>
+</p:notes>
+</file>
+
+<file path=ppt/notesSlides/notesSlide30.xml><?xml version="1.0" encoding="utf-8"?>
+<p:notes xmlns:a="http://schemas.openxmlformats.org/drawingml/2006/main" xmlns:p="http://schemas.openxmlformats.org/presentationml/2006/main" xmlns:r="http://schemas.openxmlformats.org/officeDocument/2006/relationships">
+  <p:cSld>
+    <p:spTree>
+      <p:nvGrpSpPr>
+        <p:cNvPr id="1" name=""/>
+        <p:cNvGrpSpPr/>
+        <p:nvPr/>
+      </p:nvGrpSpPr>
+      <p:grpSpPr>
+        <a:xfrm>
+          <a:off x="0" y="0"/>
+          <a:ext cx="0" cy="0"/>
+          <a:chOff x="0" y="0"/>
+          <a:chExt cx="0" cy="0"/>
+        </a:xfrm>
+      </p:grpSpPr>
+      <p:sp>
+        <p:nvSpPr>
+          <p:cNvPr id="2" name="Slide Image Placeholder 1"/>
+          <p:cNvSpPr>
+            <a:spLocks noGrp="1"/>
+          </p:cNvSpPr>
+          <p:nvPr>
+            <p:ph type="sldImg" idx="2"/>
+          </p:nvPr>
+        </p:nvSpPr>
+        <p:spPr/>
+      </p:sp>
+      <p:sp>
+        <p:nvSpPr>
+          <p:cNvPr id="3" name="Notes Placeholder 2"/>
+          <p:cNvSpPr>
+            <a:spLocks noGrp="1"/>
+          </p:cNvSpPr>
+          <p:nvPr>
+            <p:ph type="body" idx="3" sz="quarter"/>
+          </p:nvPr>
+        </p:nvSpPr>
+        <p:spPr/>
+        <p:txBody>
+          <a:bodyPr/>
+          <a:lstStyle/>
+          <a:p>
+            <a:r>
+              <a:t>VO: Then be honest about the cost and the time, because overselling loses the case the moment a sharp official tests it. Name the real cost: a small permanent team and governance, typically around two per cent of the digital-government budget, sustained for five years. And name the real horizon: about six months to a roadmap the minister can show, but years to full maturity — which means the minister who launches this will likely not be the one who completes it. Said as a weakness, that sinks the case. Said as the truth about serious institution-building, it is what separates a credible proposal from a salesman's. Ministers fund people who tell them the real timeline.</a:t>
+            </a:r>
+          </a:p>
+        </p:txBody>
+      </p:sp>
+      <p:sp>
+        <p:nvSpPr>
+          <p:cNvPr id="4" name="Slide Number Placeholder 3"/>
+          <p:cNvSpPr>
+            <a:spLocks noGrp="1"/>
+          </p:cNvSpPr>
+          <p:nvPr>
+            <p:ph type="sldNum" idx="5" sz="quarter"/>
+          </p:nvPr>
+        </p:nvSpPr>
+        <p:spPr/>
+      </p:sp>
+    </p:spTree>
+  </p:cSld>
+  <p:clrMapOvr>
+    <a:masterClrMapping/>
+  </p:clrMapOvr>
+</p:notes>
+</file>
+
+<file path=ppt/notesSlides/notesSlide31.xml><?xml version="1.0" encoding="utf-8"?>
+<p:notes xmlns:a="http://schemas.openxmlformats.org/drawingml/2006/main" xmlns:p="http://schemas.openxmlformats.org/presentationml/2006/main" xmlns:r="http://schemas.openxmlformats.org/officeDocument/2006/relationships">
+  <p:cSld>
+    <p:spTree>
+      <p:nvGrpSpPr>
+        <p:cNvPr id="1" name=""/>
+        <p:cNvGrpSpPr/>
+        <p:nvPr/>
+      </p:nvGrpSpPr>
+      <p:grpSpPr>
+        <a:xfrm>
+          <a:off x="0" y="0"/>
+          <a:ext cx="0" cy="0"/>
+          <a:chOff x="0" y="0"/>
+          <a:chExt cx="0" cy="0"/>
+        </a:xfrm>
+      </p:grpSpPr>
+      <p:sp>
+        <p:nvSpPr>
+          <p:cNvPr id="2" name="Slide Image Placeholder 1"/>
+          <p:cNvSpPr>
+            <a:spLocks noGrp="1"/>
+          </p:cNvSpPr>
+          <p:nvPr>
+            <p:ph type="sldImg" idx="2"/>
+          </p:nvPr>
+        </p:nvSpPr>
+        <p:spPr/>
+      </p:sp>
+      <p:sp>
+        <p:nvSpPr>
+          <p:cNvPr id="3" name="Notes Placeholder 2"/>
+          <p:cNvSpPr>
+            <a:spLocks noGrp="1"/>
+          </p:cNvSpPr>
+          <p:nvPr>
+            <p:ph type="body" idx="3" sz="quarter"/>
+          </p:nvPr>
+        </p:nvSpPr>
+        <p:spPr/>
+        <p:txBody>
+          <a:bodyPr/>
+          <a:lstStyle/>
+          <a:p>
+            <a:r>
+              <a:t>VO: Put it on one page, in that order. The saving — the country-level number over five years. The proof — the governments that have done it. The ask — a small permanent team, a board with real authority, around two per cent of the digital budget, and a promise to protect the team. And the horizon — six months to a roadmap, then a sustained practice. Saving, proof, ask, horizon. That single page turns a technical request the minister would defer into a business case they can defend in cabinet.</a:t>
+            </a:r>
+          </a:p>
+        </p:txBody>
+      </p:sp>
+      <p:sp>
+        <p:nvSpPr>
+          <p:cNvPr id="4" name="Slide Number Placeholder 3"/>
+          <p:cNvSpPr>
+            <a:spLocks noGrp="1"/>
+          </p:cNvSpPr>
+          <p:nvPr>
+            <p:ph type="sldNum" idx="5" sz="quarter"/>
+          </p:nvPr>
+        </p:nvSpPr>
+        <p:spPr/>
+      </p:sp>
+    </p:spTree>
+  </p:cSld>
+  <p:clrMapOvr>
+    <a:masterClrMapping/>
+  </p:clrMapOvr>
+</p:notes>
+</file>
+
+<file path=ppt/notesSlides/notesSlide32.xml><?xml version="1.0" encoding="utf-8"?>
+<p:notes xmlns:a="http://schemas.openxmlformats.org/drawingml/2006/main" xmlns:p="http://schemas.openxmlformats.org/presentationml/2006/main" xmlns:r="http://schemas.openxmlformats.org/officeDocument/2006/relationships">
+  <p:cSld>
+    <p:spTree>
+      <p:nvGrpSpPr>
+        <p:cNvPr id="1" name=""/>
+        <p:cNvGrpSpPr/>
+        <p:nvPr/>
+      </p:nvGrpSpPr>
+      <p:grpSpPr>
+        <a:xfrm>
+          <a:off x="0" y="0"/>
+          <a:ext cx="0" cy="0"/>
+          <a:chOff x="0" y="0"/>
+          <a:chExt cx="0" cy="0"/>
+        </a:xfrm>
+      </p:grpSpPr>
+      <p:sp>
+        <p:nvSpPr>
+          <p:cNvPr id="2" name="Slide Image Placeholder 1"/>
+          <p:cNvSpPr>
+            <a:spLocks noGrp="1"/>
+          </p:cNvSpPr>
+          <p:nvPr>
+            <p:ph type="sldImg" idx="2"/>
+          </p:nvPr>
+        </p:nvSpPr>
+        <p:spPr/>
+      </p:sp>
+      <p:sp>
+        <p:nvSpPr>
+          <p:cNvPr id="3" name="Notes Placeholder 2"/>
+          <p:cNvSpPr>
+            <a:spLocks noGrp="1"/>
+          </p:cNvSpPr>
+          <p:nvPr>
+            <p:ph type="body" idx="3" sz="quarter"/>
+          </p:nvPr>
+        </p:nvSpPr>
+        <p:spPr/>
+        <p:txBody>
+          <a:bodyPr/>
+          <a:lstStyle/>
+          <a:p>
+            <a:r>
+              <a:t>PRACTICE BOX (on-screen only — never read it, never paraphrase it, never point at it). It replaces the narrated handoff: this video ends on the recap and the Sources slide.</a:t>
+            </a:r>
+          </a:p>
+          <a:p/>
+          <a:p>
+            <a:r>
+              <a:t>VO: Winning the commitment is not an architecture conversation. It is a one-page business case: the saving, the proof, the ask, the honest horizon. Bring that, and your minister can say yes and defend it.</a:t>
+            </a:r>
+          </a:p>
+        </p:txBody>
+      </p:sp>
+      <p:sp>
+        <p:nvSpPr>
+          <p:cNvPr id="4" name="Slide Number Placeholder 3"/>
+          <p:cNvSpPr>
+            <a:spLocks noGrp="1"/>
+          </p:cNvSpPr>
+          <p:nvPr>
+            <p:ph type="sldNum" idx="5" sz="quarter"/>
+          </p:nvPr>
+        </p:nvSpPr>
+        <p:spPr/>
+      </p:sp>
+    </p:spTree>
+  </p:cSld>
+  <p:clrMapOvr>
+    <a:masterClrMapping/>
+  </p:clrMapOvr>
+</p:notes>
+</file>
+
+<file path=ppt/notesSlides/notesSlide33.xml><?xml version="1.0" encoding="utf-8"?>
 <p:notes xmlns:a="http://schemas.openxmlformats.org/drawingml/2006/main" xmlns:p="http://schemas.openxmlformats.org/presentationml/2006/main" xmlns:r="http://schemas.openxmlformats.org/officeDocument/2006/relationships">
   <p:cSld>
     <p:spTree>
@@ -11602,1466 +11602,6 @@
 </p:sldMaster>
 </file>
 
-<file path=ppt/slides/slide1.xml><?xml version="1.0" encoding="utf-8"?>
-<p:sld xmlns:a="http://schemas.openxmlformats.org/drawingml/2006/main" xmlns:r="http://schemas.openxmlformats.org/officeDocument/2006/relationships" xmlns:p="http://schemas.openxmlformats.org/presentationml/2006/main">
-  <p:cSld>
-    <p:spTree>
-      <p:nvGrpSpPr>
-        <p:cNvPr id="1" name=""/>
-        <p:cNvGrpSpPr/>
-        <p:nvPr/>
-      </p:nvGrpSpPr>
-      <p:grpSpPr>
-        <a:xfrm>
-          <a:off x="0" y="0"/>
-          <a:ext cx="0" cy="0"/>
-          <a:chOff x="0" y="0"/>
-          <a:chExt cx="0" cy="0"/>
-        </a:xfrm>
-      </p:grpSpPr>
-      <p:cxnSp>
-        <p:nvCxnSpPr>
-          <p:cNvPr id="11" name="Straight Connector 10">
-            <a:extLst>
-              <a:ext uri="{FF2B5EF4-FFF2-40B4-BE49-F238E27FC236}">
-                <a16:creationId xmlns:a16="http://schemas.microsoft.com/office/drawing/2014/main" id="{D9AD66F2-F7C0-4D03-9150-D28F17AC561D}"/>
-              </a:ext>
-            </a:extLst>
-          </p:cNvPr>
-          <p:cNvCxnSpPr>
-            <a:cxnSpLocks/>
-          </p:cNvCxnSpPr>
-          <p:nvPr/>
-        </p:nvCxnSpPr>
-        <p:spPr>
-          <a:xfrm>
-            <a:off x="373021" y="2198718"/>
-            <a:ext cx="6843567" cy="0"/>
-          </a:xfrm>
-          <a:prstGeom prst="line">
-            <a:avLst/>
-          </a:prstGeom>
-          <a:ln w="12700">
-            <a:solidFill>
-              <a:srgbClr val="009CD6"/>
-            </a:solidFill>
-          </a:ln>
-        </p:spPr>
-        <p:style>
-          <a:lnRef idx="1">
-            <a:schemeClr val="accent1"/>
-          </a:lnRef>
-          <a:fillRef idx="0">
-            <a:schemeClr val="accent1"/>
-          </a:fillRef>
-          <a:effectRef idx="0">
-            <a:schemeClr val="accent1"/>
-          </a:effectRef>
-          <a:fontRef idx="minor">
-            <a:schemeClr val="tx1"/>
-          </a:fontRef>
-        </p:style>
-      </p:cxnSp>
-      <p:sp>
-        <p:nvSpPr>
-          <p:cNvPr id="12" name="Title 9">
-            <a:extLst>
-              <a:ext uri="{FF2B5EF4-FFF2-40B4-BE49-F238E27FC236}">
-                <a16:creationId xmlns:a16="http://schemas.microsoft.com/office/drawing/2014/main" id="{EEB08032-CE0E-4986-AEDF-A41026C0E8B9}"/>
-              </a:ext>
-            </a:extLst>
-          </p:cNvPr>
-          <p:cNvSpPr txBox="1">
-            <a:spLocks/>
-          </p:cNvSpPr>
-          <p:nvPr/>
-        </p:nvSpPr>
-        <p:spPr>
-          <a:xfrm>
-            <a:off x="237734" y="702833"/>
-            <a:ext cx="6432007" cy="1218817"/>
-          </a:xfrm>
-          <a:prstGeom prst="rect">
-            <a:avLst/>
-          </a:prstGeom>
-        </p:spPr>
-        <p:txBody>
-          <a:bodyPr anchor="b">
-            <a:noAutofit/>
-          </a:bodyPr>
-          <a:lstStyle>
-            <a:lvl1pPr algn="l" defTabSz="914400" rtl="0" eaLnBrk="1" latinLnBrk="0" hangingPunct="1">
-              <a:lnSpc>
-                <a:spcPct val="90000"/>
-              </a:lnSpc>
-              <a:spcBef>
-                <a:spcPct val="0"/>
-              </a:spcBef>
-              <a:buNone/>
-              <a:defRPr sz="4000" kern="1200">
-                <a:solidFill>
-                  <a:schemeClr val="bg1"/>
-                </a:solidFill>
-                <a:latin typeface="Arial" panose="020B0604020202020204" pitchFamily="34" charset="0"/>
-                <a:ea typeface="+mj-ea"/>
-                <a:cs typeface="Arial" panose="020B0604020202020204" pitchFamily="34" charset="0"/>
-              </a:defRPr>
-            </a:lvl1pPr>
-          </a:lstStyle>
-          <a:p>
-            <a:r>
-              <a:rPr sz="2400" b="1" i="0">
-                <a:solidFill>
-                  <a:srgbClr val="1A1A1A"/>
-                </a:solidFill>
-                <a:latin typeface="Arial"/>
-              </a:rPr>
-              <a:t>5.4 — Win the commitment — the business case that gets your minister to yes</a:t>
-            </a:r>
-          </a:p>
-        </p:txBody>
-      </p:sp>
-      <p:pic>
-        <p:nvPicPr>
-          <p:cNvPr id="7" name="Picture 6">
-            <a:extLst>
-              <a:ext uri="{FF2B5EF4-FFF2-40B4-BE49-F238E27FC236}">
-                <a16:creationId xmlns:a16="http://schemas.microsoft.com/office/drawing/2014/main" id="{A2066351-C569-4C4C-A096-308777FCDC32}"/>
-              </a:ext>
-            </a:extLst>
-          </p:cNvPr>
-          <p:cNvPicPr>
-            <a:picLocks noChangeAspect="1"/>
-          </p:cNvPicPr>
-          <p:nvPr/>
-        </p:nvPicPr>
-        <p:blipFill>
-          <a:blip r:embed="rId2">
-            <a:extLst>
-              <a:ext uri="{28A0092B-C50C-407E-A947-70E740481C1C}">
-                <a14:useLocalDpi xmlns:a14="http://schemas.microsoft.com/office/drawing/2010/main" val="0"/>
-              </a:ext>
-            </a:extLst>
-          </a:blip>
-          <a:srcRect t="20219" b="14729"/>
-          <a:stretch>
-            <a:fillRect/>
-          </a:stretch>
-        </p:blipFill>
-        <p:spPr>
-          <a:xfrm>
-            <a:off x="0" y="5620871"/>
-            <a:ext cx="1323975" cy="1218816"/>
-          </a:xfrm>
-          <a:prstGeom prst="rect">
-            <a:avLst/>
-          </a:prstGeom>
-        </p:spPr>
-      </p:pic>
-      <p:sp>
-        <p:nvSpPr>
-          <p:cNvPr id="14" name="Title 9">
-            <a:extLst>
-              <a:ext uri="{FF2B5EF4-FFF2-40B4-BE49-F238E27FC236}">
-                <a16:creationId xmlns:a16="http://schemas.microsoft.com/office/drawing/2014/main" id="{B5087B80-3EE4-1881-0130-ED58CA625092}"/>
-              </a:ext>
-            </a:extLst>
-          </p:cNvPr>
-          <p:cNvSpPr txBox="1">
-            <a:spLocks/>
-          </p:cNvSpPr>
-          <p:nvPr/>
-        </p:nvSpPr>
-        <p:spPr>
-          <a:xfrm>
-            <a:off x="284452" y="2475786"/>
-            <a:ext cx="6382893" cy="953213"/>
-          </a:xfrm>
-          <a:prstGeom prst="rect">
-            <a:avLst/>
-          </a:prstGeom>
-        </p:spPr>
-        <p:txBody>
-          <a:bodyPr anchor="t">
-            <a:noAutofit/>
-          </a:bodyPr>
-          <a:lstStyle>
-            <a:lvl1pPr algn="l" defTabSz="914400" rtl="0" eaLnBrk="1" latinLnBrk="0" hangingPunct="1">
-              <a:lnSpc>
-                <a:spcPct val="90000"/>
-              </a:lnSpc>
-              <a:spcBef>
-                <a:spcPct val="0"/>
-              </a:spcBef>
-              <a:buNone/>
-              <a:defRPr sz="4000" kern="1200">
-                <a:solidFill>
-                  <a:schemeClr val="bg1"/>
-                </a:solidFill>
-                <a:latin typeface="Arial" panose="020B0604020202020204" pitchFamily="34" charset="0"/>
-                <a:ea typeface="+mj-ea"/>
-                <a:cs typeface="Arial" panose="020B0604020202020204" pitchFamily="34" charset="0"/>
-              </a:defRPr>
-            </a:lvl1pPr>
-          </a:lstStyle>
-          <a:p>
-            <a:pPr marL="0" marR="0" lvl="0" indent="0" rtl="0">
-              <a:spcBef>
-                <a:spcPts val="600"/>
-              </a:spcBef>
-              <a:spcAft>
-                <a:spcPts val="0"/>
-              </a:spcAft>
-              <a:buNone/>
-            </a:pPr>
-            <a:r>
-              <a:rPr sz="1300" b="1" i="0">
-                <a:solidFill>
-                  <a:srgbClr val="006E96"/>
-                </a:solidFill>
-                <a:latin typeface="Arial"/>
-              </a:rPr>
-              <a:t>KP1 · Government Enterprise Architecture · Module 5 · Video 5.4</a:t>
-            </a:r>
-          </a:p>
-          <a:p>
-            <a:r>
-              <a:rPr sz="1200" b="0" i="1">
-                <a:solidFill>
-                  <a:srgbClr val="595959"/>
-                </a:solidFill>
-                <a:latin typeface="Arial"/>
-              </a:rPr>
-              <a:t>Winning the minister's commitment is not about the architecture — it's about the number. Pair the whole-of-government re-use saving with the proven evidence and an honest time horizon, and you turn a technical case into one a minister can take to cabinet.</a:t>
-            </a:r>
-          </a:p>
-        </p:txBody>
-      </p:sp>
-      <p:sp>
-        <p:nvSpPr>
-          <p:cNvPr id="17" name="Title 9">
-            <a:extLst>
-              <a:ext uri="{FF2B5EF4-FFF2-40B4-BE49-F238E27FC236}">
-                <a16:creationId xmlns:a16="http://schemas.microsoft.com/office/drawing/2014/main" id="{5E8796F7-DD26-D250-5E97-B38B22298E72}"/>
-              </a:ext>
-            </a:extLst>
-          </p:cNvPr>
-          <p:cNvSpPr txBox="1">
-            <a:spLocks/>
-          </p:cNvSpPr>
-          <p:nvPr/>
-        </p:nvSpPr>
-        <p:spPr>
-          <a:xfrm>
-            <a:off x="284452" y="4363897"/>
-            <a:ext cx="6382893" cy="953213"/>
-          </a:xfrm>
-          <a:prstGeom prst="rect">
-            <a:avLst/>
-          </a:prstGeom>
-        </p:spPr>
-        <p:txBody>
-          <a:bodyPr anchor="t">
-            <a:noAutofit/>
-          </a:bodyPr>
-          <a:lstStyle>
-            <a:lvl1pPr algn="l" defTabSz="914400" rtl="0" eaLnBrk="1" latinLnBrk="0" hangingPunct="1">
-              <a:lnSpc>
-                <a:spcPct val="90000"/>
-              </a:lnSpc>
-              <a:spcBef>
-                <a:spcPct val="0"/>
-              </a:spcBef>
-              <a:buNone/>
-              <a:defRPr sz="4000" kern="1200">
-                <a:solidFill>
-                  <a:schemeClr val="bg1"/>
-                </a:solidFill>
-                <a:latin typeface="Arial" panose="020B0604020202020204" pitchFamily="34" charset="0"/>
-                <a:ea typeface="+mj-ea"/>
-                <a:cs typeface="Arial" panose="020B0604020202020204" pitchFamily="34" charset="0"/>
-              </a:defRPr>
-            </a:lvl1pPr>
-          </a:lstStyle>
-          <a:p>
-            <a:pPr marL="0" marR="0" lvl="0" indent="0" rtl="0">
-              <a:spcBef>
-                <a:spcPts val="600"/>
-              </a:spcBef>
-              <a:spcAft>
-                <a:spcPts val="1200"/>
-              </a:spcAft>
-              <a:buNone/>
-            </a:pPr>
-            <a:r>
-              <a:rPr sz="1400" b="1" i="0">
-                <a:solidFill>
-                  <a:srgbClr val="1A1A1A"/>
-                </a:solidFill>
-                <a:latin typeface="Arial"/>
-              </a:rPr>
-              <a:t>Length: </a:t>
-            </a:r>
-            <a:r>
-              <a:rPr sz="1400" b="0" i="0">
-                <a:solidFill>
-                  <a:srgbClr val="1A1A1A"/>
-                </a:solidFill>
-                <a:latin typeface="Arial"/>
-              </a:rPr>
-              <a:t>~4 mins</a:t>
-            </a:r>
-          </a:p>
-          <a:p>
-            <a:r>
-              <a:rPr sz="1400" b="1" i="0">
-                <a:solidFill>
-                  <a:srgbClr val="1A1A1A"/>
-                </a:solidFill>
-                <a:latin typeface="Arial"/>
-              </a:rPr>
-              <a:t>Target audience: </a:t>
-            </a:r>
-            <a:r>
-              <a:rPr sz="1400" b="0" i="0">
-                <a:solidFill>
-                  <a:srgbClr val="1A1A1A"/>
-                </a:solidFill>
-                <a:latin typeface="Arial"/>
-              </a:rPr>
-              <a:t>Director-general · head of a sectoral ICT unit · technical secretary</a:t>
-            </a:r>
-          </a:p>
-        </p:txBody>
-      </p:sp>
-      <p:sp>
-        <p:nvSpPr>
-          <p:cNvPr id="18" name="Rectangle 17"/>
-          <p:cNvSpPr/>
-          <p:nvPr/>
-        </p:nvSpPr>
-        <p:spPr>
-          <a:xfrm>
-            <a:off x="7022592" y="0"/>
-            <a:ext cx="5169103" cy="6858000"/>
-          </a:xfrm>
-          <a:prstGeom prst="rect">
-            <a:avLst/>
-          </a:prstGeom>
-          <a:solidFill>
-            <a:srgbClr val="009CD6"/>
-          </a:solidFill>
-          <a:ln>
-            <a:noFill/>
-          </a:ln>
-          <a:effectLst/>
-        </p:spPr>
-        <p:style>
-          <a:lnRef idx="1">
-            <a:schemeClr val="accent1"/>
-          </a:lnRef>
-          <a:fillRef idx="3">
-            <a:schemeClr val="accent1"/>
-          </a:fillRef>
-          <a:effectRef idx="2">
-            <a:schemeClr val="accent1"/>
-          </a:effectRef>
-          <a:fontRef idx="minor">
-            <a:schemeClr val="lt1"/>
-          </a:fontRef>
-        </p:style>
-        <p:txBody>
-          <a:bodyPr rtlCol="0" anchor="ctr"/>
-          <a:lstStyle/>
-          <a:p>
-            <a:pPr algn="ctr"/>
-          </a:p>
-        </p:txBody>
-      </p:sp>
-      <p:sp>
-        <p:nvSpPr>
-          <p:cNvPr id="19" name="TextBox 18"/>
-          <p:cNvSpPr txBox="1"/>
-          <p:nvPr/>
-        </p:nvSpPr>
-        <p:spPr>
-          <a:xfrm>
-            <a:off x="7452360" y="457200"/>
-            <a:ext cx="4297680" cy="457200"/>
-          </a:xfrm>
-          <a:prstGeom prst="rect">
-            <a:avLst/>
-          </a:prstGeom>
-          <a:noFill/>
-        </p:spPr>
-        <p:txBody>
-          <a:bodyPr wrap="square">
-            <a:spAutoFit/>
-          </a:bodyPr>
-          <a:lstStyle/>
-          <a:p>
-            <a:r>
-              <a:rPr sz="1100" b="1" i="0">
-                <a:solidFill>
-                  <a:srgbClr val="E5F5FB"/>
-                </a:solidFill>
-                <a:latin typeface="Arial"/>
-              </a:rPr>
-              <a:t>THE CASE YOU CARRY INTO THE ROOM</a:t>
-            </a:r>
-          </a:p>
-        </p:txBody>
-      </p:sp>
-      <p:sp>
-        <p:nvSpPr>
-          <p:cNvPr id="20" name="Rounded Rectangle 19"/>
-          <p:cNvSpPr/>
-          <p:nvPr/>
-        </p:nvSpPr>
-        <p:spPr>
-          <a:xfrm>
-            <a:off x="7452360" y="960120"/>
-            <a:ext cx="3840480" cy="658368"/>
-          </a:xfrm>
-          <a:prstGeom prst="roundRect">
-            <a:avLst>
-              <a:gd name="adj" fmla="val 14000"/>
-            </a:avLst>
-          </a:prstGeom>
-          <a:solidFill>
-            <a:srgbClr val="FFFFFF"/>
-          </a:solidFill>
-          <a:ln>
-            <a:noFill/>
-          </a:ln>
-          <a:effectLst/>
-        </p:spPr>
-        <p:style>
-          <a:lnRef idx="1">
-            <a:schemeClr val="accent1"/>
-          </a:lnRef>
-          <a:fillRef idx="3">
-            <a:schemeClr val="accent1"/>
-          </a:fillRef>
-          <a:effectRef idx="2">
-            <a:schemeClr val="accent1"/>
-          </a:effectRef>
-          <a:fontRef idx="minor">
-            <a:schemeClr val="lt1"/>
-          </a:fontRef>
-        </p:style>
-        <p:txBody>
-          <a:bodyPr rtlCol="0" anchor="ctr" lIns="164592" wrap="square"/>
-          <a:lstStyle/>
-          <a:p>
-            <a:pPr algn="ctr"/>
-            <a:r>
-              <a:rPr sz="1500" b="1" i="0">
-                <a:solidFill>
-                  <a:srgbClr val="1A1A1A"/>
-                </a:solidFill>
-                <a:latin typeface="Arial"/>
-              </a:rPr>
-              <a:t>Proven — four real governments</a:t>
-            </a:r>
-          </a:p>
-        </p:txBody>
-      </p:sp>
-      <p:sp>
-        <p:nvSpPr>
-          <p:cNvPr id="21" name="Rounded Rectangle 20"/>
-          <p:cNvSpPr/>
-          <p:nvPr/>
-        </p:nvSpPr>
-        <p:spPr>
-          <a:xfrm>
-            <a:off x="7452360" y="1892808"/>
-            <a:ext cx="3840480" cy="658368"/>
-          </a:xfrm>
-          <a:prstGeom prst="roundRect">
-            <a:avLst>
-              <a:gd name="adj" fmla="val 14000"/>
-            </a:avLst>
-          </a:prstGeom>
-          <a:solidFill>
-            <a:srgbClr val="FFFFFF"/>
-          </a:solidFill>
-          <a:ln>
-            <a:noFill/>
-          </a:ln>
-          <a:effectLst/>
-        </p:spPr>
-        <p:style>
-          <a:lnRef idx="1">
-            <a:schemeClr val="accent1"/>
-          </a:lnRef>
-          <a:fillRef idx="3">
-            <a:schemeClr val="accent1"/>
-          </a:fillRef>
-          <a:effectRef idx="2">
-            <a:schemeClr val="accent1"/>
-          </a:effectRef>
-          <a:fontRef idx="minor">
-            <a:schemeClr val="lt1"/>
-          </a:fontRef>
-        </p:style>
-        <p:txBody>
-          <a:bodyPr rtlCol="0" anchor="ctr" lIns="164592" wrap="square"/>
-          <a:lstStyle/>
-          <a:p>
-            <a:pPr algn="ctr"/>
-            <a:r>
-              <a:rPr sz="1500" b="1" i="0">
-                <a:solidFill>
-                  <a:srgbClr val="1A1A1A"/>
-                </a:solidFill>
-                <a:latin typeface="Arial"/>
-              </a:rPr>
-              <a:t>Portable — sector after sector</a:t>
-            </a:r>
-          </a:p>
-        </p:txBody>
-      </p:sp>
-      <p:sp>
-        <p:nvSpPr>
-          <p:cNvPr id="22" name="Rounded Rectangle 21"/>
-          <p:cNvSpPr/>
-          <p:nvPr/>
-        </p:nvSpPr>
-        <p:spPr>
-          <a:xfrm>
-            <a:off x="7452360" y="2825496"/>
-            <a:ext cx="3840480" cy="658368"/>
-          </a:xfrm>
-          <a:prstGeom prst="roundRect">
-            <a:avLst>
-              <a:gd name="adj" fmla="val 14000"/>
-            </a:avLst>
-          </a:prstGeom>
-          <a:solidFill>
-            <a:srgbClr val="FFFFFF"/>
-          </a:solidFill>
-          <a:ln>
-            <a:noFill/>
-          </a:ln>
-          <a:effectLst/>
-        </p:spPr>
-        <p:style>
-          <a:lnRef idx="1">
-            <a:schemeClr val="accent1"/>
-          </a:lnRef>
-          <a:fillRef idx="3">
-            <a:schemeClr val="accent1"/>
-          </a:fillRef>
-          <a:effectRef idx="2">
-            <a:schemeClr val="accent1"/>
-          </a:effectRef>
-          <a:fontRef idx="minor">
-            <a:schemeClr val="lt1"/>
-          </a:fontRef>
-        </p:style>
-        <p:txBody>
-          <a:bodyPr rtlCol="0" anchor="ctr" lIns="164592" wrap="square"/>
-          <a:lstStyle/>
-          <a:p>
-            <a:pPr algn="ctr"/>
-            <a:r>
-              <a:rPr sz="1500" b="1" i="0">
-                <a:solidFill>
-                  <a:srgbClr val="1A1A1A"/>
-                </a:solidFill>
-                <a:latin typeface="Arial"/>
-              </a:rPr>
-              <a:t>The commitment — the one page</a:t>
-            </a:r>
-          </a:p>
-        </p:txBody>
-      </p:sp>
-      <p:sp>
-        <p:nvSpPr>
-          <p:cNvPr id="23" name="Rounded Rectangle 22"/>
-          <p:cNvSpPr/>
-          <p:nvPr/>
-        </p:nvSpPr>
-        <p:spPr>
-          <a:xfrm>
-            <a:off x="7452360" y="3758184"/>
-            <a:ext cx="3840480" cy="658368"/>
-          </a:xfrm>
-          <a:prstGeom prst="roundRect">
-            <a:avLst>
-              <a:gd name="adj" fmla="val 14000"/>
-            </a:avLst>
-          </a:prstGeom>
-          <a:solidFill>
-            <a:srgbClr val="FFFFFF"/>
-          </a:solidFill>
-          <a:ln>
-            <a:noFill/>
-          </a:ln>
-          <a:effectLst/>
-        </p:spPr>
-        <p:style>
-          <a:lnRef idx="1">
-            <a:schemeClr val="accent1"/>
-          </a:lnRef>
-          <a:fillRef idx="3">
-            <a:schemeClr val="accent1"/>
-          </a:fillRef>
-          <a:effectRef idx="2">
-            <a:schemeClr val="accent1"/>
-          </a:effectRef>
-          <a:fontRef idx="minor">
-            <a:schemeClr val="lt1"/>
-          </a:fontRef>
-        </p:style>
-        <p:txBody>
-          <a:bodyPr rtlCol="0" anchor="ctr" lIns="164592" wrap="square"/>
-          <a:lstStyle/>
-          <a:p>
-            <a:pPr algn="ctr"/>
-            <a:r>
-              <a:rPr sz="1500" b="1" i="0">
-                <a:solidFill>
-                  <a:srgbClr val="1A1A1A"/>
-                </a:solidFill>
-                <a:latin typeface="Arial"/>
-              </a:rPr>
-              <a:t>The capability — your own people</a:t>
-            </a:r>
-          </a:p>
-        </p:txBody>
-      </p:sp>
-      <p:sp>
-        <p:nvSpPr>
-          <p:cNvPr id="24" name="Rounded Rectangle 23"/>
-          <p:cNvSpPr/>
-          <p:nvPr/>
-        </p:nvSpPr>
-        <p:spPr>
-          <a:xfrm>
-            <a:off x="7452360" y="4690872"/>
-            <a:ext cx="3840480" cy="658368"/>
-          </a:xfrm>
-          <a:prstGeom prst="roundRect">
-            <a:avLst>
-              <a:gd name="adj" fmla="val 14000"/>
-            </a:avLst>
-          </a:prstGeom>
-          <a:solidFill>
-            <a:srgbClr val="006E96"/>
-          </a:solidFill>
-          <a:ln>
-            <a:noFill/>
-          </a:ln>
-          <a:effectLst/>
-        </p:spPr>
-        <p:style>
-          <a:lnRef idx="1">
-            <a:schemeClr val="accent1"/>
-          </a:lnRef>
-          <a:fillRef idx="3">
-            <a:schemeClr val="accent1"/>
-          </a:fillRef>
-          <a:effectRef idx="2">
-            <a:schemeClr val="accent1"/>
-          </a:effectRef>
-          <a:fontRef idx="minor">
-            <a:schemeClr val="lt1"/>
-          </a:fontRef>
-        </p:style>
-        <p:txBody>
-          <a:bodyPr rtlCol="0" anchor="ctr" lIns="164592" wrap="square"/>
-          <a:lstStyle/>
-          <a:p>
-            <a:pPr algn="ctr"/>
-            <a:r>
-              <a:rPr sz="1500" b="1" i="0">
-                <a:solidFill>
-                  <a:srgbClr val="FFFFFF"/>
-                </a:solidFill>
-                <a:latin typeface="Arial"/>
-              </a:rPr>
-              <a:t>Necessary now, not just useful</a:t>
-            </a:r>
-          </a:p>
-        </p:txBody>
-      </p:sp>
-      <p:sp>
-        <p:nvSpPr>
-          <p:cNvPr id="25" name="TextBox 24"/>
-          <p:cNvSpPr txBox="1"/>
-          <p:nvPr/>
-        </p:nvSpPr>
-        <p:spPr>
-          <a:xfrm>
-            <a:off x="7452360" y="5806440"/>
-            <a:ext cx="4297680" cy="731520"/>
-          </a:xfrm>
-          <a:prstGeom prst="rect">
-            <a:avLst/>
-          </a:prstGeom>
-          <a:noFill/>
-        </p:spPr>
-        <p:txBody>
-          <a:bodyPr wrap="square">
-            <a:spAutoFit/>
-          </a:bodyPr>
-          <a:lstStyle/>
-          <a:p>
-            <a:r>
-              <a:rPr sz="1200" b="0" i="0">
-                <a:solidFill>
-                  <a:srgbClr val="FFFFFF"/>
-                </a:solidFill>
-                <a:latin typeface="Arial"/>
-              </a:rPr>
-              <a:t>4 governments · 4 killers to design out · 1 page for the minister</a:t>
-            </a:r>
-          </a:p>
-        </p:txBody>
-      </p:sp>
-    </p:spTree>
-    <p:extLst>
-      <p:ext uri="{BB962C8B-B14F-4D97-AF65-F5344CB8AC3E}">
-        <p14:creationId xmlns:p14="http://schemas.microsoft.com/office/powerpoint/2010/main" val="1196800265"/>
-      </p:ext>
-    </p:extLst>
-  </p:cSld>
-  <p:clrMapOvr>
-    <a:masterClrMapping/>
-  </p:clrMapOvr>
-</p:sld>
-</file>
-
-<file path=ppt/slides/slide23.xml><?xml version="1.0" encoding="utf-8"?>
-<p:sld xmlns:a="http://schemas.openxmlformats.org/drawingml/2006/main" xmlns:p="http://schemas.openxmlformats.org/presentationml/2006/main" xmlns:r="http://schemas.openxmlformats.org/officeDocument/2006/relationships">
-  <p:cSld>
-    <p:spTree>
-      <p:nvGrpSpPr>
-        <p:cNvPr id="1" name=""/>
-        <p:cNvGrpSpPr/>
-        <p:nvPr/>
-      </p:nvGrpSpPr>
-      <p:grpSpPr/>
-      <p:sp>
-        <p:nvSpPr>
-          <p:cNvPr id="2" name="TextBox 1"/>
-          <p:cNvSpPr txBox="1"/>
-          <p:nvPr/>
-        </p:nvSpPr>
-        <p:spPr>
-          <a:xfrm>
-            <a:off x="822960" y="822960"/>
-            <a:ext cx="7315200" cy="457200"/>
-          </a:xfrm>
-          <a:prstGeom prst="rect">
-            <a:avLst/>
-          </a:prstGeom>
-          <a:noFill/>
-        </p:spPr>
-        <p:txBody>
-          <a:bodyPr wrap="square">
-            <a:spAutoFit/>
-          </a:bodyPr>
-          <a:lstStyle/>
-          <a:p>
-            <a:r>
-              <a:rPr sz="1200" b="1" i="0">
-                <a:solidFill>
-                  <a:srgbClr val="595959"/>
-                </a:solidFill>
-                <a:latin typeface="Arial"/>
-              </a:rPr>
-              <a:t>KP1 · MODULE 5 · VIDEO 5.4</a:t>
-            </a:r>
-          </a:p>
-        </p:txBody>
-      </p:sp>
-      <p:sp>
-        <p:nvSpPr>
-          <p:cNvPr id="3" name="TextBox 2"/>
-          <p:cNvSpPr txBox="1"/>
-          <p:nvPr/>
-        </p:nvSpPr>
-        <p:spPr>
-          <a:xfrm>
-            <a:off x="822960" y="1828800"/>
-            <a:ext cx="2011680" cy="1097280"/>
-          </a:xfrm>
-          <a:prstGeom prst="rect">
-            <a:avLst/>
-          </a:prstGeom>
-          <a:noFill/>
-        </p:spPr>
-        <p:txBody>
-          <a:bodyPr wrap="square">
-            <a:spAutoFit/>
-          </a:bodyPr>
-          <a:lstStyle/>
-          <a:p>
-            <a:r>
-              <a:rPr sz="6000" b="1" i="0">
-                <a:solidFill>
-                  <a:srgbClr val="009CD6"/>
-                </a:solidFill>
-                <a:latin typeface="Arial"/>
-              </a:rPr>
-              <a:t>5.4</a:t>
-            </a:r>
-          </a:p>
-        </p:txBody>
-      </p:sp>
-      <p:sp>
-        <p:nvSpPr>
-          <p:cNvPr id="4" name="TextBox 3"/>
-          <p:cNvSpPr txBox="1"/>
-          <p:nvPr/>
-        </p:nvSpPr>
-        <p:spPr>
-          <a:xfrm>
-            <a:off x="822960" y="2880360"/>
-            <a:ext cx="9601200" cy="1371600"/>
-          </a:xfrm>
-          <a:prstGeom prst="rect">
-            <a:avLst/>
-          </a:prstGeom>
-          <a:noFill/>
-        </p:spPr>
-        <p:txBody>
-          <a:bodyPr wrap="square">
-            <a:spAutoFit/>
-          </a:bodyPr>
-          <a:lstStyle/>
-          <a:p>
-            <a:r>
-              <a:rPr sz="3400" b="1" i="0">
-                <a:solidFill>
-                  <a:srgbClr val="1A1A1A"/>
-                </a:solidFill>
-                <a:latin typeface="Arial"/>
-              </a:rPr>
-              <a:t>Win the commitment — the business case that gets your minister to yes</a:t>
-            </a:r>
-          </a:p>
-        </p:txBody>
-      </p:sp>
-      <p:sp>
-        <p:nvSpPr>
-          <p:cNvPr id="5" name="TextBox 4"/>
-          <p:cNvSpPr txBox="1"/>
-          <p:nvPr/>
-        </p:nvSpPr>
-        <p:spPr>
-          <a:xfrm>
-            <a:off x="822960" y="4343400"/>
-            <a:ext cx="9875520" cy="1554480"/>
-          </a:xfrm>
-          <a:prstGeom prst="rect">
-            <a:avLst/>
-          </a:prstGeom>
-          <a:noFill/>
-        </p:spPr>
-        <p:txBody>
-          <a:bodyPr wrap="square">
-            <a:spAutoFit/>
-          </a:bodyPr>
-          <a:lstStyle/>
-          <a:p>
-            <a:r>
-              <a:rPr sz="1700" b="0" i="1">
-                <a:solidFill>
-                  <a:srgbClr val="595959"/>
-                </a:solidFill>
-                <a:latin typeface="Arial"/>
-              </a:rPr>
-              <a:t>Winning the minister's commitment is not about the architecture — it's about the number. Pair the whole-of-government re-use saving with the proven evidence and an honest time horizon, and you turn a technical case into one a minister can take to cabinet.</a:t>
-            </a:r>
-          </a:p>
-        </p:txBody>
-      </p:sp>
-      <p:sp>
-        <p:nvSpPr>
-          <p:cNvPr id="6" name="TextBox 5"/>
-          <p:cNvSpPr txBox="1"/>
-          <p:nvPr/>
-        </p:nvSpPr>
-        <p:spPr>
-          <a:xfrm>
-            <a:off x="822960" y="5989320"/>
-            <a:ext cx="7315200" cy="365760"/>
-          </a:xfrm>
-          <a:prstGeom prst="rect">
-            <a:avLst/>
-          </a:prstGeom>
-          <a:noFill/>
-        </p:spPr>
-        <p:txBody>
-          <a:bodyPr wrap="square">
-            <a:spAutoFit/>
-          </a:bodyPr>
-          <a:lstStyle/>
-          <a:p>
-            <a:r>
-              <a:rPr sz="1200" b="0" i="0">
-                <a:solidFill>
-                  <a:srgbClr val="595959"/>
-                </a:solidFill>
-                <a:latin typeface="Arial"/>
-              </a:rPr>
-              <a:t>~4 minutes · standalone video · voice-over on text slides</a:t>
-            </a:r>
-          </a:p>
-        </p:txBody>
-      </p:sp>
-    </p:spTree>
-  </p:cSld>
-  <p:clrMapOvr>
-    <a:masterClrMapping/>
-  </p:clrMapOvr>
-</p:sld>
-</file>
-
-<file path=ppt/slides/slide24.xml><?xml version="1.0" encoding="utf-8"?>
-<p:sld xmlns:a="http://schemas.openxmlformats.org/drawingml/2006/main" xmlns:p="http://schemas.openxmlformats.org/presentationml/2006/main" xmlns:r="http://schemas.openxmlformats.org/officeDocument/2006/relationships">
-  <p:cSld>
-    <p:spTree>
-      <p:nvGrpSpPr>
-        <p:cNvPr id="1" name=""/>
-        <p:cNvGrpSpPr/>
-        <p:nvPr/>
-      </p:nvGrpSpPr>
-      <p:grpSpPr/>
-      <p:sp>
-        <p:nvSpPr>
-          <p:cNvPr id="2" name="Rectangle 1"/>
-          <p:cNvSpPr/>
-          <p:nvPr/>
-        </p:nvSpPr>
-        <p:spPr>
-          <a:xfrm>
-            <a:off x="457200" y="384048"/>
-            <a:ext cx="45720" cy="256032"/>
-          </a:xfrm>
-          <a:prstGeom prst="rect">
-            <a:avLst/>
-          </a:prstGeom>
-          <a:solidFill>
-            <a:srgbClr val="009CD6"/>
-          </a:solidFill>
-          <a:ln>
-            <a:noFill/>
-          </a:ln>
-          <a:effectLst/>
-        </p:spPr>
-        <p:style>
-          <a:lnRef idx="1">
-            <a:schemeClr val="accent1"/>
-          </a:lnRef>
-          <a:fillRef idx="3">
-            <a:schemeClr val="accent1"/>
-          </a:fillRef>
-          <a:effectRef idx="2">
-            <a:schemeClr val="accent1"/>
-          </a:effectRef>
-          <a:fontRef idx="minor">
-            <a:schemeClr val="lt1"/>
-          </a:fontRef>
-        </p:style>
-        <p:txBody>
-          <a:bodyPr rtlCol="0" anchor="ctr"/>
-          <a:lstStyle/>
-          <a:p>
-            <a:pPr algn="ctr"/>
-          </a:p>
-        </p:txBody>
-      </p:sp>
-      <p:sp>
-        <p:nvSpPr>
-          <p:cNvPr id="3" name="TextBox 2"/>
-          <p:cNvSpPr txBox="1"/>
-          <p:nvPr/>
-        </p:nvSpPr>
-        <p:spPr>
-          <a:xfrm>
-            <a:off x="621792" y="274320"/>
-            <a:ext cx="11247120" cy="914400"/>
-          </a:xfrm>
-          <a:prstGeom prst="rect">
-            <a:avLst/>
-          </a:prstGeom>
-          <a:noFill/>
-        </p:spPr>
-        <p:txBody>
-          <a:bodyPr wrap="square">
-            <a:spAutoFit/>
-          </a:bodyPr>
-          <a:lstStyle/>
-          <a:p>
-            <a:r>
-              <a:rPr sz="2800" b="1" i="0">
-                <a:solidFill>
-                  <a:srgbClr val="1A1A1A"/>
-                </a:solidFill>
-                <a:latin typeface="Arial"/>
-              </a:rPr>
-              <a:t>Lead with the saving, not the architecture</a:t>
-            </a:r>
-          </a:p>
-        </p:txBody>
-      </p:sp>
-      <p:sp>
-        <p:nvSpPr>
-          <p:cNvPr id="4" name="TextBox 3"/>
-          <p:cNvSpPr txBox="1"/>
-          <p:nvPr/>
-        </p:nvSpPr>
-        <p:spPr>
-          <a:xfrm>
-            <a:off x="658368" y="1600200"/>
-            <a:ext cx="10881360" cy="2194560"/>
-          </a:xfrm>
-          <a:prstGeom prst="rect">
-            <a:avLst/>
-          </a:prstGeom>
-          <a:noFill/>
-        </p:spPr>
-        <p:txBody>
-          <a:bodyPr wrap="square">
-            <a:spAutoFit/>
-          </a:bodyPr>
-          <a:lstStyle/>
-          <a:p>
-            <a:pPr>
-              <a:spcAft>
-                <a:spcPts val="1200"/>
-              </a:spcAft>
-            </a:pPr>
-            <a:r>
-              <a:rPr sz="2000" b="0" i="0">
-                <a:solidFill>
-                  <a:srgbClr val="1A1A1A"/>
-                </a:solidFill>
-                <a:latin typeface="Arial"/>
-              </a:rPr>
-              <a:t>The strongest number you have is the cost of fragmentation: every programme that builds its own identity, its own registry, its own integration means the country pays many times for one thing.</a:t>
-            </a:r>
-          </a:p>
-          <a:p>
-            <a:pPr>
-              <a:spcAft>
-                <a:spcPts val="1200"/>
-              </a:spcAft>
-            </a:pPr>
-            <a:r>
-              <a:rPr sz="2000" b="0" i="0">
-                <a:solidFill>
-                  <a:srgbClr val="1A1A1A"/>
-                </a:solidFill>
-                <a:latin typeface="Arial"/>
-              </a:rPr>
-              <a:t>A whole-of-government business case shows that consuming shared building blocks instead would save a meaningful share of the sectoral digital budget over five years. That number, not the four-layer diagram, opens a cabinet conversation.</a:t>
-            </a:r>
-          </a:p>
-        </p:txBody>
-      </p:sp>
-      <p:sp>
-        <p:nvSpPr>
-          <p:cNvPr id="5" name="Rounded Rectangle 4"/>
-          <p:cNvSpPr/>
-          <p:nvPr/>
-        </p:nvSpPr>
-        <p:spPr>
-          <a:xfrm>
-            <a:off x="658368" y="3977639"/>
-            <a:ext cx="10881360" cy="1325880"/>
-          </a:xfrm>
-          <a:prstGeom prst="roundRect">
-            <a:avLst>
-              <a:gd name="adj" fmla="val 4500"/>
-            </a:avLst>
-          </a:prstGeom>
-          <a:solidFill>
-            <a:srgbClr val="E5F5FB"/>
-          </a:solidFill>
-          <a:ln>
-            <a:noFill/>
-          </a:ln>
-          <a:effectLst/>
-        </p:spPr>
-        <p:style>
-          <a:lnRef idx="1">
-            <a:schemeClr val="accent1"/>
-          </a:lnRef>
-          <a:fillRef idx="3">
-            <a:schemeClr val="accent1"/>
-          </a:fillRef>
-          <a:effectRef idx="2">
-            <a:schemeClr val="accent1"/>
-          </a:effectRef>
-          <a:fontRef idx="minor">
-            <a:schemeClr val="lt1"/>
-          </a:fontRef>
-        </p:style>
-        <p:txBody>
-          <a:bodyPr rtlCol="0" anchor="ctr"/>
-          <a:lstStyle/>
-          <a:p>
-            <a:pPr algn="ctr"/>
-          </a:p>
-        </p:txBody>
-      </p:sp>
-      <p:sp>
-        <p:nvSpPr>
-          <p:cNvPr id="6" name="TextBox 5"/>
-          <p:cNvSpPr txBox="1"/>
-          <p:nvPr/>
-        </p:nvSpPr>
-        <p:spPr>
-          <a:xfrm>
-            <a:off x="859536" y="4169663"/>
-            <a:ext cx="10479024" cy="1051560"/>
-          </a:xfrm>
-          <a:prstGeom prst="rect">
-            <a:avLst/>
-          </a:prstGeom>
-          <a:noFill/>
-        </p:spPr>
-        <p:txBody>
-          <a:bodyPr wrap="square">
-            <a:spAutoFit/>
-          </a:bodyPr>
-          <a:lstStyle/>
-          <a:p>
-            <a:pPr>
-              <a:spcAft>
-                <a:spcPts val="700"/>
-              </a:spcAft>
-            </a:pPr>
-            <a:r>
-              <a:rPr sz="2300" b="1" i="0">
-                <a:solidFill>
-                  <a:srgbClr val="006E96"/>
-                </a:solidFill>
-                <a:latin typeface="Arial"/>
-              </a:rPr>
-              <a:t>The architecture is how you achieve the saving. The saving is what you sell.</a:t>
-            </a:r>
-          </a:p>
-        </p:txBody>
-      </p:sp>
-      <p:sp>
-        <p:nvSpPr>
-          <p:cNvPr id="7" name="TextBox 6"/>
-          <p:cNvSpPr txBox="1"/>
-          <p:nvPr/>
-        </p:nvSpPr>
-        <p:spPr>
-          <a:xfrm>
-            <a:off x="457200" y="6473952"/>
-            <a:ext cx="7772400" cy="292608"/>
-          </a:xfrm>
-          <a:prstGeom prst="rect">
-            <a:avLst/>
-          </a:prstGeom>
-          <a:noFill/>
-        </p:spPr>
-        <p:txBody>
-          <a:bodyPr wrap="square">
-            <a:spAutoFit/>
-          </a:bodyPr>
-          <a:lstStyle/>
-          <a:p>
-            <a:r>
-              <a:rPr sz="900" b="0" i="0">
-                <a:solidFill>
-                  <a:srgbClr val="595959"/>
-                </a:solidFill>
-                <a:latin typeface="Arial"/>
-              </a:rPr>
-              <a:t>5.4 · Win the commitment — the business case that gets your minister to yes</a:t>
-            </a:r>
-          </a:p>
-        </p:txBody>
-      </p:sp>
-    </p:spTree>
-  </p:cSld>
-  <p:clrMapOvr>
-    <a:masterClrMapping/>
-  </p:clrMapOvr>
-</p:sld>
-</file>
-
-<file path=ppt/slides/slide25.xml><?xml version="1.0" encoding="utf-8"?>
-<p:sld xmlns:a="http://schemas.openxmlformats.org/drawingml/2006/main" xmlns:p="http://schemas.openxmlformats.org/presentationml/2006/main" xmlns:r="http://schemas.openxmlformats.org/officeDocument/2006/relationships">
-  <p:cSld>
-    <p:spTree>
-      <p:nvGrpSpPr>
-        <p:cNvPr id="1" name=""/>
-        <p:cNvGrpSpPr/>
-        <p:nvPr/>
-      </p:nvGrpSpPr>
-      <p:grpSpPr/>
-      <p:sp>
-        <p:nvSpPr>
-          <p:cNvPr id="2" name="Rectangle 1"/>
-          <p:cNvSpPr/>
-          <p:nvPr/>
-        </p:nvSpPr>
-        <p:spPr>
-          <a:xfrm>
-            <a:off x="457200" y="384048"/>
-            <a:ext cx="45720" cy="256032"/>
-          </a:xfrm>
-          <a:prstGeom prst="rect">
-            <a:avLst/>
-          </a:prstGeom>
-          <a:solidFill>
-            <a:srgbClr val="009CD6"/>
-          </a:solidFill>
-          <a:ln>
-            <a:noFill/>
-          </a:ln>
-          <a:effectLst/>
-        </p:spPr>
-        <p:style>
-          <a:lnRef idx="1">
-            <a:schemeClr val="accent1"/>
-          </a:lnRef>
-          <a:fillRef idx="3">
-            <a:schemeClr val="accent1"/>
-          </a:fillRef>
-          <a:effectRef idx="2">
-            <a:schemeClr val="accent1"/>
-          </a:effectRef>
-          <a:fontRef idx="minor">
-            <a:schemeClr val="lt1"/>
-          </a:fontRef>
-        </p:style>
-        <p:txBody>
-          <a:bodyPr rtlCol="0" anchor="ctr"/>
-          <a:lstStyle/>
-          <a:p>
-            <a:pPr algn="ctr"/>
-          </a:p>
-        </p:txBody>
-      </p:sp>
-      <p:sp>
-        <p:nvSpPr>
-          <p:cNvPr id="3" name="TextBox 2"/>
-          <p:cNvSpPr txBox="1"/>
-          <p:nvPr/>
-        </p:nvSpPr>
-        <p:spPr>
-          <a:xfrm>
-            <a:off x="621792" y="274320"/>
-            <a:ext cx="11247120" cy="914400"/>
-          </a:xfrm>
-          <a:prstGeom prst="rect">
-            <a:avLst/>
-          </a:prstGeom>
-          <a:noFill/>
-        </p:spPr>
-        <p:txBody>
-          <a:bodyPr wrap="square">
-            <a:spAutoFit/>
-          </a:bodyPr>
-          <a:lstStyle/>
-          <a:p>
-            <a:r>
-              <a:rPr sz="2800" b="1" i="0">
-                <a:solidFill>
-                  <a:srgbClr val="1A1A1A"/>
-                </a:solidFill>
-                <a:latin typeface="Arial"/>
-              </a:rPr>
-              <a:t>Back the number with the proof, because a minister's first worry is risk</a:t>
-            </a:r>
-          </a:p>
-        </p:txBody>
-      </p:sp>
-      <p:sp>
-        <p:nvSpPr>
-          <p:cNvPr id="4" name="TextBox 3"/>
-          <p:cNvSpPr txBox="1"/>
-          <p:nvPr/>
-        </p:nvSpPr>
-        <p:spPr>
-          <a:xfrm>
-            <a:off x="658368" y="1600200"/>
-            <a:ext cx="10881360" cy="2194560"/>
-          </a:xfrm>
-          <a:prstGeom prst="rect">
-            <a:avLst/>
-          </a:prstGeom>
-          <a:noFill/>
-        </p:spPr>
-        <p:txBody>
-          <a:bodyPr wrap="square">
-            <a:spAutoFit/>
-          </a:bodyPr>
-          <a:lstStyle/>
-          <a:p>
-            <a:pPr>
-              <a:spcAft>
-                <a:spcPts val="1200"/>
-              </a:spcAft>
-            </a:pPr>
-            <a:r>
-              <a:rPr sz="2000" b="0" i="0">
-                <a:solidFill>
-                  <a:srgbClr val="1A1A1A"/>
-                </a:solidFill>
-                <a:latin typeface="Arial"/>
-              </a:rPr>
-              <a:t>A saving that depends on an untested approach is easy to refuse. A saving backed by four governments that have already built the same pattern is much harder to wave away.</a:t>
-            </a:r>
-          </a:p>
-          <a:p>
-            <a:pPr>
-              <a:spcAft>
-                <a:spcPts val="1200"/>
-              </a:spcAft>
-            </a:pPr>
-            <a:r>
-              <a:rPr sz="2000" b="0" i="0">
-                <a:solidFill>
-                  <a:srgbClr val="1A1A1A"/>
-                </a:solidFill>
-                <a:latin typeface="Arial"/>
-              </a:rPr>
-              <a:t>This is a charted path that countries like yours have walked, with the obstacles documented.</a:t>
-            </a:r>
-          </a:p>
-        </p:txBody>
-      </p:sp>
-      <p:sp>
-        <p:nvSpPr>
-          <p:cNvPr id="5" name="Rounded Rectangle 4"/>
-          <p:cNvSpPr/>
-          <p:nvPr/>
-        </p:nvSpPr>
-        <p:spPr>
-          <a:xfrm>
-            <a:off x="658368" y="3977639"/>
-            <a:ext cx="10881360" cy="1325880"/>
-          </a:xfrm>
-          <a:prstGeom prst="roundRect">
-            <a:avLst>
-              <a:gd name="adj" fmla="val 4500"/>
-            </a:avLst>
-          </a:prstGeom>
-          <a:solidFill>
-            <a:srgbClr val="E5F5FB"/>
-          </a:solidFill>
-          <a:ln>
-            <a:noFill/>
-          </a:ln>
-          <a:effectLst/>
-        </p:spPr>
-        <p:style>
-          <a:lnRef idx="1">
-            <a:schemeClr val="accent1"/>
-          </a:lnRef>
-          <a:fillRef idx="3">
-            <a:schemeClr val="accent1"/>
-          </a:fillRef>
-          <a:effectRef idx="2">
-            <a:schemeClr val="accent1"/>
-          </a:effectRef>
-          <a:fontRef idx="minor">
-            <a:schemeClr val="lt1"/>
-          </a:fontRef>
-        </p:style>
-        <p:txBody>
-          <a:bodyPr rtlCol="0" anchor="ctr"/>
-          <a:lstStyle/>
-          <a:p>
-            <a:pPr algn="ctr"/>
-          </a:p>
-        </p:txBody>
-      </p:sp>
-      <p:sp>
-        <p:nvSpPr>
-          <p:cNvPr id="6" name="TextBox 5"/>
-          <p:cNvSpPr txBox="1"/>
-          <p:nvPr/>
-        </p:nvSpPr>
-        <p:spPr>
-          <a:xfrm>
-            <a:off x="859536" y="4169663"/>
-            <a:ext cx="10479024" cy="1051560"/>
-          </a:xfrm>
-          <a:prstGeom prst="rect">
-            <a:avLst/>
-          </a:prstGeom>
-          <a:noFill/>
-        </p:spPr>
-        <p:txBody>
-          <a:bodyPr wrap="square">
-            <a:spAutoFit/>
-          </a:bodyPr>
-          <a:lstStyle/>
-          <a:p>
-            <a:pPr>
-              <a:spcAft>
-                <a:spcPts val="700"/>
-              </a:spcAft>
-            </a:pPr>
-            <a:r>
-              <a:rPr sz="2300" b="1" i="0">
-                <a:solidFill>
-                  <a:srgbClr val="006E96"/>
-                </a:solidFill>
-                <a:latin typeface="Arial"/>
-              </a:rPr>
-              <a:t>Not a bet on a theory — a saving others have already proven is real.</a:t>
-            </a:r>
-          </a:p>
-        </p:txBody>
-      </p:sp>
-      <p:sp>
-        <p:nvSpPr>
-          <p:cNvPr id="7" name="TextBox 6"/>
-          <p:cNvSpPr txBox="1"/>
-          <p:nvPr/>
-        </p:nvSpPr>
-        <p:spPr>
-          <a:xfrm>
-            <a:off x="457200" y="6473952"/>
-            <a:ext cx="7772400" cy="292608"/>
-          </a:xfrm>
-          <a:prstGeom prst="rect">
-            <a:avLst/>
-          </a:prstGeom>
-          <a:noFill/>
-        </p:spPr>
-        <p:txBody>
-          <a:bodyPr wrap="square">
-            <a:spAutoFit/>
-          </a:bodyPr>
-          <a:lstStyle/>
-          <a:p>
-            <a:r>
-              <a:rPr sz="900" b="0" i="0">
-                <a:solidFill>
-                  <a:srgbClr val="595959"/>
-                </a:solidFill>
-                <a:latin typeface="Arial"/>
-              </a:rPr>
-              <a:t>5.4 · Win the commitment — the business case that gets your minister to yes</a:t>
-            </a:r>
-          </a:p>
-        </p:txBody>
-      </p:sp>
-    </p:spTree>
-  </p:cSld>
-  <p:clrMapOvr>
-    <a:masterClrMapping/>
-  </p:clrMapOvr>
-</p:sld>
-</file>
-
 <file path=ppt/slides/slide26.xml><?xml version="1.0" encoding="utf-8"?>
 <p:sld xmlns:a="http://schemas.openxmlformats.org/drawingml/2006/main" xmlns:p="http://schemas.openxmlformats.org/presentationml/2006/main" xmlns:r="http://schemas.openxmlformats.org/officeDocument/2006/relationships">
   <p:cSld>
@@ -13074,58 +11614,14 @@
       <p:grpSpPr/>
       <p:sp>
         <p:nvSpPr>
-          <p:cNvPr id="2" name="Rectangle 1"/>
-          <p:cNvSpPr/>
-          <p:nvPr/>
-        </p:nvSpPr>
-        <p:spPr>
-          <a:xfrm>
-            <a:off x="457200" y="384048"/>
-            <a:ext cx="45720" cy="256032"/>
-          </a:xfrm>
-          <a:prstGeom prst="rect">
-            <a:avLst/>
-          </a:prstGeom>
-          <a:solidFill>
-            <a:srgbClr val="009CD6"/>
-          </a:solidFill>
-          <a:ln>
-            <a:noFill/>
-          </a:ln>
-          <a:effectLst/>
-        </p:spPr>
-        <p:style>
-          <a:lnRef idx="1">
-            <a:schemeClr val="accent1"/>
-          </a:lnRef>
-          <a:fillRef idx="3">
-            <a:schemeClr val="accent1"/>
-          </a:fillRef>
-          <a:effectRef idx="2">
-            <a:schemeClr val="accent1"/>
-          </a:effectRef>
-          <a:fontRef idx="minor">
-            <a:schemeClr val="lt1"/>
-          </a:fontRef>
-        </p:style>
-        <p:txBody>
-          <a:bodyPr rtlCol="0" anchor="ctr"/>
-          <a:lstStyle/>
-          <a:p>
-            <a:pPr algn="ctr"/>
-          </a:p>
-        </p:txBody>
-      </p:sp>
-      <p:sp>
-        <p:nvSpPr>
-          <p:cNvPr id="3" name="TextBox 2"/>
+          <p:cNvPr id="2" name="TextBox 1"/>
           <p:cNvSpPr txBox="1"/>
           <p:nvPr/>
         </p:nvSpPr>
         <p:spPr>
           <a:xfrm>
-            <a:off x="621792" y="274320"/>
-            <a:ext cx="11247120" cy="914400"/>
+            <a:off x="822960" y="822960"/>
+            <a:ext cx="7315200" cy="457200"/>
           </a:xfrm>
           <a:prstGeom prst="rect">
             <a:avLst/>
@@ -13139,27 +11635,95 @@
           <a:lstStyle/>
           <a:p>
             <a:r>
-              <a:rPr sz="2800" b="1" i="0">
+              <a:rPr sz="1200" b="1" i="0">
+                <a:solidFill>
+                  <a:srgbClr val="595959"/>
+                </a:solidFill>
+                <a:latin typeface="Arial"/>
+              </a:rPr>
+              <a:t>KP1 · MODULE 5 · VIDEO 5.4</a:t>
+            </a:r>
+          </a:p>
+        </p:txBody>
+      </p:sp>
+      <p:sp>
+        <p:nvSpPr>
+          <p:cNvPr id="3" name="TextBox 2"/>
+          <p:cNvSpPr txBox="1"/>
+          <p:nvPr/>
+        </p:nvSpPr>
+        <p:spPr>
+          <a:xfrm>
+            <a:off x="822960" y="1828800"/>
+            <a:ext cx="2011680" cy="1097280"/>
+          </a:xfrm>
+          <a:prstGeom prst="rect">
+            <a:avLst/>
+          </a:prstGeom>
+          <a:noFill/>
+        </p:spPr>
+        <p:txBody>
+          <a:bodyPr wrap="square">
+            <a:spAutoFit/>
+          </a:bodyPr>
+          <a:lstStyle/>
+          <a:p>
+            <a:r>
+              <a:rPr sz="6000" b="1" i="0">
+                <a:solidFill>
+                  <a:srgbClr val="009CD6"/>
+                </a:solidFill>
+                <a:latin typeface="Arial"/>
+              </a:rPr>
+              <a:t>5.4</a:t>
+            </a:r>
+          </a:p>
+        </p:txBody>
+      </p:sp>
+      <p:sp>
+        <p:nvSpPr>
+          <p:cNvPr id="4" name="TextBox 3"/>
+          <p:cNvSpPr txBox="1"/>
+          <p:nvPr/>
+        </p:nvSpPr>
+        <p:spPr>
+          <a:xfrm>
+            <a:off x="822960" y="2880360"/>
+            <a:ext cx="9601200" cy="1371600"/>
+          </a:xfrm>
+          <a:prstGeom prst="rect">
+            <a:avLst/>
+          </a:prstGeom>
+          <a:noFill/>
+        </p:spPr>
+        <p:txBody>
+          <a:bodyPr wrap="square">
+            <a:spAutoFit/>
+          </a:bodyPr>
+          <a:lstStyle/>
+          <a:p>
+            <a:r>
+              <a:rPr sz="3400" b="1" i="0">
                 <a:solidFill>
                   <a:srgbClr val="1A1A1A"/>
                 </a:solidFill>
                 <a:latin typeface="Arial"/>
               </a:rPr>
-              <a:t>Ministers fund people who tell them the real timeline</a:t>
-            </a:r>
-          </a:p>
-        </p:txBody>
-      </p:sp>
-      <p:sp>
-        <p:nvSpPr>
-          <p:cNvPr id="4" name="TextBox 3"/>
+              <a:t>Win the commitment — the business case that gets your minister to yes</a:t>
+            </a:r>
+          </a:p>
+        </p:txBody>
+      </p:sp>
+      <p:sp>
+        <p:nvSpPr>
+          <p:cNvPr id="5" name="TextBox 4"/>
           <p:cNvSpPr txBox="1"/>
           <p:nvPr/>
         </p:nvSpPr>
         <p:spPr>
           <a:xfrm>
-            <a:off x="658368" y="1600200"/>
-            <a:ext cx="10881360" cy="2194560"/>
+            <a:off x="822960" y="4343400"/>
+            <a:ext cx="9875520" cy="1554480"/>
           </a:xfrm>
           <a:prstGeom prst="rect">
             <a:avLst/>
@@ -13172,154 +11736,48 @@
           </a:bodyPr>
           <a:lstStyle/>
           <a:p>
-            <a:pPr>
-              <a:spcAft>
-                <a:spcPts val="1200"/>
-              </a:spcAft>
-            </a:pPr>
-            <a:r>
-              <a:rPr sz="2000" b="0" i="0">
-                <a:solidFill>
-                  <a:srgbClr val="1A1A1A"/>
-                </a:solidFill>
-                <a:latin typeface="Arial"/>
-              </a:rPr>
-              <a:t>Name the real cost: a small permanent team and governance, typically around two per cent of the digital-government budget, sustained for five years.</a:t>
-            </a:r>
-          </a:p>
-          <a:p>
-            <a:pPr>
-              <a:spcAft>
-                <a:spcPts val="1200"/>
-              </a:spcAft>
-            </a:pPr>
-            <a:r>
-              <a:rPr sz="2000" b="0" i="0">
-                <a:solidFill>
-                  <a:srgbClr val="1A1A1A"/>
-                </a:solidFill>
-                <a:latin typeface="Arial"/>
-              </a:rPr>
-              <a:t>And the real horizon: about six months to a roadmap the minister can show, but years to full maturity — so the minister who launches this will likely not be the one who completes it.</a:t>
-            </a:r>
-          </a:p>
-        </p:txBody>
-      </p:sp>
-      <p:sp>
-        <p:nvSpPr>
-          <p:cNvPr id="5" name="Rounded Rectangle 4"/>
-          <p:cNvSpPr/>
-          <p:nvPr/>
-        </p:nvSpPr>
-        <p:spPr>
-          <a:xfrm>
-            <a:off x="658368" y="3977639"/>
-            <a:ext cx="10881360" cy="1325880"/>
-          </a:xfrm>
-          <a:prstGeom prst="roundRect">
-            <a:avLst>
-              <a:gd name="adj" fmla="val 4500"/>
-            </a:avLst>
-          </a:prstGeom>
-          <a:solidFill>
-            <a:srgbClr val="E5F5FB"/>
-          </a:solidFill>
-          <a:ln>
-            <a:noFill/>
-          </a:ln>
-          <a:effectLst/>
-        </p:spPr>
-        <p:style>
-          <a:lnRef idx="1">
-            <a:schemeClr val="accent1"/>
-          </a:lnRef>
-          <a:fillRef idx="3">
-            <a:schemeClr val="accent1"/>
-          </a:fillRef>
-          <a:effectRef idx="2">
-            <a:schemeClr val="accent1"/>
-          </a:effectRef>
-          <a:fontRef idx="minor">
-            <a:schemeClr val="lt1"/>
-          </a:fontRef>
-        </p:style>
-        <p:txBody>
-          <a:bodyPr rtlCol="0" anchor="ctr"/>
-          <a:lstStyle/>
-          <a:p>
-            <a:pPr algn="ctr"/>
-          </a:p>
-        </p:txBody>
-      </p:sp>
-      <p:sp>
-        <p:nvSpPr>
-          <p:cNvPr id="6" name="TextBox 5"/>
-          <p:cNvSpPr txBox="1"/>
-          <p:nvPr/>
-        </p:nvSpPr>
-        <p:spPr>
-          <a:xfrm>
-            <a:off x="859536" y="4169663"/>
-            <a:ext cx="10479024" cy="1051560"/>
-          </a:xfrm>
-          <a:prstGeom prst="rect">
-            <a:avLst/>
-          </a:prstGeom>
-          <a:noFill/>
-        </p:spPr>
-        <p:txBody>
-          <a:bodyPr wrap="square">
-            <a:spAutoFit/>
-          </a:bodyPr>
-          <a:lstStyle/>
-          <a:p>
-            <a:pPr>
-              <a:spcAft>
-                <a:spcPts val="700"/>
-              </a:spcAft>
-            </a:pPr>
-            <a:r>
-              <a:rPr sz="2300" b="1" i="0">
-                <a:solidFill>
-                  <a:srgbClr val="006E96"/>
-                </a:solidFill>
-                <a:latin typeface="Arial"/>
-              </a:rPr>
-              <a:t>Said as a weakness, that sinks the case. Said as the truth, it wins it.</a:t>
-            </a:r>
-          </a:p>
-        </p:txBody>
-      </p:sp>
-      <p:sp>
-        <p:nvSpPr>
-          <p:cNvPr id="7" name="TextBox 6"/>
-          <p:cNvSpPr txBox="1"/>
-          <p:nvPr/>
-        </p:nvSpPr>
-        <p:spPr>
-          <a:xfrm>
-            <a:off x="457200" y="6473952"/>
-            <a:ext cx="7772400" cy="292608"/>
-          </a:xfrm>
-          <a:prstGeom prst="rect">
-            <a:avLst/>
-          </a:prstGeom>
-          <a:noFill/>
-        </p:spPr>
-        <p:txBody>
-          <a:bodyPr wrap="square">
-            <a:spAutoFit/>
-          </a:bodyPr>
-          <a:lstStyle/>
-          <a:p>
-            <a:r>
-              <a:rPr sz="900" b="0" i="0">
+            <a:r>
+              <a:rPr sz="1700" b="0" i="1">
                 <a:solidFill>
                   <a:srgbClr val="595959"/>
                 </a:solidFill>
                 <a:latin typeface="Arial"/>
               </a:rPr>
-              <a:t>5.4 · Win the commitment — the business case that gets your minister to yes</a:t>
+              <a:t>Winning the minister's commitment is not about the architecture — it's about the number. Pair the whole-of-government re-use saving with the proven evidence and an honest time horizon, and you turn a technical case into one a minister can take to cabinet.</a:t>
+            </a:r>
+          </a:p>
+        </p:txBody>
+      </p:sp>
+      <p:sp>
+        <p:nvSpPr>
+          <p:cNvPr id="6" name="TextBox 5"/>
+          <p:cNvSpPr txBox="1"/>
+          <p:nvPr/>
+        </p:nvSpPr>
+        <p:spPr>
+          <a:xfrm>
+            <a:off x="822960" y="5989320"/>
+            <a:ext cx="7315200" cy="365760"/>
+          </a:xfrm>
+          <a:prstGeom prst="rect">
+            <a:avLst/>
+          </a:prstGeom>
+          <a:noFill/>
+        </p:spPr>
+        <p:txBody>
+          <a:bodyPr wrap="square">
+            <a:spAutoFit/>
+          </a:bodyPr>
+          <a:lstStyle/>
+          <a:p>
+            <a:r>
+              <a:rPr sz="1200" b="0" i="0">
+                <a:solidFill>
+                  <a:srgbClr val="595959"/>
+                </a:solidFill>
+                <a:latin typeface="Arial"/>
+              </a:rPr>
+              <a:t>~4 minutes · standalone video · voice-over on text slides</a:t>
             </a:r>
           </a:p>
         </p:txBody>
@@ -13344,58 +11802,14 @@
       <p:grpSpPr/>
       <p:sp>
         <p:nvSpPr>
-          <p:cNvPr id="2" name="Rectangle 1"/>
-          <p:cNvSpPr/>
-          <p:nvPr/>
-        </p:nvSpPr>
-        <p:spPr>
-          <a:xfrm>
-            <a:off x="457200" y="384048"/>
-            <a:ext cx="45720" cy="256032"/>
-          </a:xfrm>
-          <a:prstGeom prst="rect">
-            <a:avLst/>
-          </a:prstGeom>
-          <a:solidFill>
-            <a:srgbClr val="009CD6"/>
-          </a:solidFill>
-          <a:ln>
-            <a:noFill/>
-          </a:ln>
-          <a:effectLst/>
-        </p:spPr>
-        <p:style>
-          <a:lnRef idx="1">
-            <a:schemeClr val="accent1"/>
-          </a:lnRef>
-          <a:fillRef idx="3">
-            <a:schemeClr val="accent1"/>
-          </a:fillRef>
-          <a:effectRef idx="2">
-            <a:schemeClr val="accent1"/>
-          </a:effectRef>
-          <a:fontRef idx="minor">
-            <a:schemeClr val="lt1"/>
-          </a:fontRef>
-        </p:style>
-        <p:txBody>
-          <a:bodyPr rtlCol="0" anchor="ctr"/>
-          <a:lstStyle/>
-          <a:p>
-            <a:pPr algn="ctr"/>
-          </a:p>
-        </p:txBody>
-      </p:sp>
-      <p:sp>
-        <p:nvSpPr>
-          <p:cNvPr id="3" name="TextBox 2"/>
+          <p:cNvPr id="2" name="TextBox 1"/>
           <p:cNvSpPr txBox="1"/>
           <p:nvPr/>
         </p:nvSpPr>
         <p:spPr>
           <a:xfrm>
-            <a:off x="621792" y="274320"/>
-            <a:ext cx="11247120" cy="914400"/>
+            <a:off x="1005840" y="1325880"/>
+            <a:ext cx="5486400" cy="365760"/>
           </a:xfrm>
           <a:prstGeom prst="rect">
             <a:avLst/>
@@ -13409,80 +11823,61 @@
           <a:lstStyle/>
           <a:p>
             <a:r>
-              <a:rPr sz="2800" b="1" i="0">
+              <a:rPr sz="1200" b="1" i="0">
+                <a:solidFill>
+                  <a:srgbClr val="006E96"/>
+                </a:solidFill>
+                <a:latin typeface="Arial"/>
+              </a:rPr>
+              <a:t>WHERE WE START</a:t>
+            </a:r>
+          </a:p>
+        </p:txBody>
+      </p:sp>
+      <p:sp>
+        <p:nvSpPr>
+          <p:cNvPr id="3" name="TextBox 2"/>
+          <p:cNvSpPr txBox="1"/>
+          <p:nvPr/>
+        </p:nvSpPr>
+        <p:spPr>
+          <a:xfrm>
+            <a:off x="1005840" y="1783080"/>
+            <a:ext cx="10149840" cy="1737360"/>
+          </a:xfrm>
+          <a:prstGeom prst="rect">
+            <a:avLst/>
+          </a:prstGeom>
+          <a:noFill/>
+        </p:spPr>
+        <p:txBody>
+          <a:bodyPr wrap="square">
+            <a:spAutoFit/>
+          </a:bodyPr>
+          <a:lstStyle/>
+          <a:p>
+            <a:r>
+              <a:rPr sz="3000" b="1" i="0">
                 <a:solidFill>
                   <a:srgbClr val="1A1A1A"/>
                 </a:solidFill>
                 <a:latin typeface="Arial"/>
               </a:rPr>
-              <a:t>The one page, in the order a minister reads it</a:t>
-            </a:r>
-          </a:p>
-        </p:txBody>
-      </p:sp>
-      <p:sp>
-        <p:nvSpPr>
-          <p:cNvPr id="4" name="Oval 3"/>
-          <p:cNvSpPr/>
-          <p:nvPr/>
-        </p:nvSpPr>
-        <p:spPr>
-          <a:xfrm>
-            <a:off x="621792" y="1508760"/>
-            <a:ext cx="310896" cy="310896"/>
-          </a:xfrm>
-          <a:prstGeom prst="ellipse">
-            <a:avLst/>
-          </a:prstGeom>
-          <a:solidFill>
-            <a:srgbClr val="009CD6"/>
-          </a:solidFill>
-          <a:ln>
-            <a:noFill/>
-          </a:ln>
-          <a:effectLst/>
-        </p:spPr>
-        <p:style>
-          <a:lnRef idx="1">
-            <a:schemeClr val="accent1"/>
-          </a:lnRef>
-          <a:fillRef idx="3">
-            <a:schemeClr val="accent1"/>
-          </a:fillRef>
-          <a:effectRef idx="2">
-            <a:schemeClr val="accent1"/>
-          </a:effectRef>
-          <a:fontRef idx="minor">
-            <a:schemeClr val="lt1"/>
-          </a:fontRef>
-        </p:style>
-        <p:txBody>
-          <a:bodyPr rtlCol="0" anchor="ctr" lIns="0" rIns="0" tIns="0" bIns="0" wrap="square"/>
-          <a:lstStyle/>
-          <a:p>
-            <a:pPr algn="ctr"/>
-            <a:r>
-              <a:rPr sz="1300" b="1" i="0">
-                <a:solidFill>
-                  <a:srgbClr val="FFFFFF"/>
-                </a:solidFill>
-                <a:latin typeface="Arial"/>
-              </a:rPr>
-              <a:t>1</a:t>
-            </a:r>
-          </a:p>
-        </p:txBody>
-      </p:sp>
-      <p:sp>
-        <p:nvSpPr>
-          <p:cNvPr id="5" name="TextBox 4"/>
+              <a:t>Ministers do not commit to architecture. They commit to numbers.</a:t>
+            </a:r>
+          </a:p>
+        </p:txBody>
+      </p:sp>
+      <p:sp>
+        <p:nvSpPr>
+          <p:cNvPr id="4" name="TextBox 3"/>
           <p:cNvSpPr txBox="1"/>
           <p:nvPr/>
         </p:nvSpPr>
         <p:spPr>
           <a:xfrm>
-            <a:off x="1115568" y="1463040"/>
-            <a:ext cx="10527487" cy="1028699"/>
+            <a:off x="1005840" y="3611880"/>
+            <a:ext cx="10149840" cy="2377440"/>
           </a:xfrm>
           <a:prstGeom prst="rect">
             <a:avLst/>
@@ -13497,530 +11892,40 @@
           <a:p>
             <a:pPr>
               <a:spcAft>
-                <a:spcPts val="300"/>
+                <a:spcPts val="800"/>
               </a:spcAft>
             </a:pPr>
             <a:r>
-              <a:rPr sz="1900" b="1" i="0">
-                <a:solidFill>
-                  <a:srgbClr val="1A1A1A"/>
-                </a:solidFill>
-                <a:latin typeface="Arial"/>
-              </a:rPr>
-              <a:t>The saving</a:t>
-            </a:r>
-          </a:p>
-          <a:p>
-            <a:pPr>
-              <a:spcAft>
-                <a:spcPts val="300"/>
-              </a:spcAft>
-            </a:pPr>
-            <a:r>
-              <a:rPr sz="1550" b="0" i="0">
+              <a:rPr sz="1700" b="0" i="0">
                 <a:solidFill>
                   <a:srgbClr val="595959"/>
                 </a:solidFill>
                 <a:latin typeface="Arial"/>
               </a:rPr>
-              <a:t>The country-level number over five years.</a:t>
-            </a:r>
-          </a:p>
-        </p:txBody>
-      </p:sp>
-      <p:sp>
-        <p:nvSpPr>
-          <p:cNvPr id="6" name="Rectangle 5"/>
-          <p:cNvSpPr/>
-          <p:nvPr/>
-        </p:nvSpPr>
-        <p:spPr>
-          <a:xfrm>
-            <a:off x="621792" y="2496312"/>
-            <a:ext cx="10881360" cy="12700"/>
-          </a:xfrm>
-          <a:prstGeom prst="rect">
-            <a:avLst/>
-          </a:prstGeom>
-          <a:solidFill>
-            <a:srgbClr val="DDECF4"/>
-          </a:solidFill>
-          <a:ln>
-            <a:noFill/>
-          </a:ln>
-          <a:effectLst/>
-        </p:spPr>
-        <p:style>
-          <a:lnRef idx="1">
-            <a:schemeClr val="accent1"/>
-          </a:lnRef>
-          <a:fillRef idx="3">
-            <a:schemeClr val="accent1"/>
-          </a:fillRef>
-          <a:effectRef idx="2">
-            <a:schemeClr val="accent1"/>
-          </a:effectRef>
-          <a:fontRef idx="minor">
-            <a:schemeClr val="lt1"/>
-          </a:fontRef>
-        </p:style>
-        <p:txBody>
-          <a:bodyPr rtlCol="0" anchor="ctr"/>
-          <a:lstStyle/>
-          <a:p>
-            <a:pPr algn="ctr"/>
-          </a:p>
-        </p:txBody>
-      </p:sp>
-      <p:sp>
-        <p:nvSpPr>
-          <p:cNvPr id="7" name="Oval 6"/>
-          <p:cNvSpPr/>
-          <p:nvPr/>
-        </p:nvSpPr>
-        <p:spPr>
-          <a:xfrm>
-            <a:off x="621792" y="2583179"/>
-            <a:ext cx="310896" cy="310896"/>
-          </a:xfrm>
-          <a:prstGeom prst="ellipse">
-            <a:avLst/>
-          </a:prstGeom>
-          <a:solidFill>
-            <a:srgbClr val="009CD6"/>
-          </a:solidFill>
-          <a:ln>
-            <a:noFill/>
-          </a:ln>
-          <a:effectLst/>
-        </p:spPr>
-        <p:style>
-          <a:lnRef idx="1">
-            <a:schemeClr val="accent1"/>
-          </a:lnRef>
-          <a:fillRef idx="3">
-            <a:schemeClr val="accent1"/>
-          </a:fillRef>
-          <a:effectRef idx="2">
-            <a:schemeClr val="accent1"/>
-          </a:effectRef>
-          <a:fontRef idx="minor">
-            <a:schemeClr val="lt1"/>
-          </a:fontRef>
-        </p:style>
-        <p:txBody>
-          <a:bodyPr rtlCol="0" anchor="ctr" lIns="0" rIns="0" tIns="0" bIns="0" wrap="square"/>
-          <a:lstStyle/>
-          <a:p>
-            <a:pPr algn="ctr"/>
-            <a:r>
-              <a:rPr sz="1300" b="1" i="0">
-                <a:solidFill>
-                  <a:srgbClr val="FFFFFF"/>
-                </a:solidFill>
-                <a:latin typeface="Arial"/>
-              </a:rPr>
-              <a:t>2</a:t>
-            </a:r>
-          </a:p>
-        </p:txBody>
-      </p:sp>
-      <p:sp>
-        <p:nvSpPr>
-          <p:cNvPr id="8" name="TextBox 7"/>
-          <p:cNvSpPr txBox="1"/>
-          <p:nvPr/>
-        </p:nvSpPr>
-        <p:spPr>
-          <a:xfrm>
-            <a:off x="1115568" y="2537460"/>
-            <a:ext cx="10527487" cy="1028699"/>
-          </a:xfrm>
-          <a:prstGeom prst="rect">
-            <a:avLst/>
-          </a:prstGeom>
-          <a:noFill/>
-        </p:spPr>
-        <p:txBody>
-          <a:bodyPr wrap="square">
-            <a:spAutoFit/>
-          </a:bodyPr>
-          <a:lstStyle/>
+              <a:t>The hardest step is getting the team, the mandate and the money.</a:t>
+            </a:r>
+          </a:p>
           <a:p>
             <a:pPr>
               <a:spcAft>
-                <a:spcPts val="300"/>
+                <a:spcPts val="800"/>
               </a:spcAft>
             </a:pPr>
             <a:r>
-              <a:rPr sz="1900" b="1" i="0">
-                <a:solidFill>
-                  <a:srgbClr val="1A1A1A"/>
-                </a:solidFill>
-                <a:latin typeface="Arial"/>
-              </a:rPr>
-              <a:t>The proof</a:t>
-            </a:r>
-          </a:p>
-          <a:p>
-            <a:pPr>
-              <a:spcAft>
-                <a:spcPts val="300"/>
-              </a:spcAft>
-            </a:pPr>
-            <a:r>
-              <a:rPr sz="1550" b="0" i="0">
+              <a:rPr sz="1700" b="0" i="0">
                 <a:solidFill>
                   <a:srgbClr val="595959"/>
                 </a:solidFill>
                 <a:latin typeface="Arial"/>
               </a:rPr>
-              <a:t>The governments that have already done it.</a:t>
-            </a:r>
-          </a:p>
-        </p:txBody>
-      </p:sp>
-      <p:sp>
-        <p:nvSpPr>
-          <p:cNvPr id="9" name="Rectangle 8"/>
-          <p:cNvSpPr/>
-          <p:nvPr/>
-        </p:nvSpPr>
-        <p:spPr>
-          <a:xfrm>
-            <a:off x="621792" y="3570732"/>
-            <a:ext cx="10881360" cy="12700"/>
-          </a:xfrm>
-          <a:prstGeom prst="rect">
-            <a:avLst/>
-          </a:prstGeom>
-          <a:solidFill>
-            <a:srgbClr val="DDECF4"/>
-          </a:solidFill>
-          <a:ln>
-            <a:noFill/>
-          </a:ln>
-          <a:effectLst/>
-        </p:spPr>
-        <p:style>
-          <a:lnRef idx="1">
-            <a:schemeClr val="accent1"/>
-          </a:lnRef>
-          <a:fillRef idx="3">
-            <a:schemeClr val="accent1"/>
-          </a:fillRef>
-          <a:effectRef idx="2">
-            <a:schemeClr val="accent1"/>
-          </a:effectRef>
-          <a:fontRef idx="minor">
-            <a:schemeClr val="lt1"/>
-          </a:fontRef>
-        </p:style>
-        <p:txBody>
-          <a:bodyPr rtlCol="0" anchor="ctr"/>
-          <a:lstStyle/>
-          <a:p>
-            <a:pPr algn="ctr"/>
-          </a:p>
-        </p:txBody>
-      </p:sp>
-      <p:sp>
-        <p:nvSpPr>
-          <p:cNvPr id="10" name="Oval 9"/>
-          <p:cNvSpPr/>
-          <p:nvPr/>
-        </p:nvSpPr>
-        <p:spPr>
-          <a:xfrm>
-            <a:off x="621792" y="3657599"/>
-            <a:ext cx="310896" cy="310896"/>
-          </a:xfrm>
-          <a:prstGeom prst="ellipse">
-            <a:avLst/>
-          </a:prstGeom>
-          <a:solidFill>
-            <a:srgbClr val="009CD6"/>
-          </a:solidFill>
-          <a:ln>
-            <a:noFill/>
-          </a:ln>
-          <a:effectLst/>
-        </p:spPr>
-        <p:style>
-          <a:lnRef idx="1">
-            <a:schemeClr val="accent1"/>
-          </a:lnRef>
-          <a:fillRef idx="3">
-            <a:schemeClr val="accent1"/>
-          </a:fillRef>
-          <a:effectRef idx="2">
-            <a:schemeClr val="accent1"/>
-          </a:effectRef>
-          <a:fontRef idx="minor">
-            <a:schemeClr val="lt1"/>
-          </a:fontRef>
-        </p:style>
-        <p:txBody>
-          <a:bodyPr rtlCol="0" anchor="ctr" lIns="0" rIns="0" tIns="0" bIns="0" wrap="square"/>
-          <a:lstStyle/>
-          <a:p>
-            <a:pPr algn="ctr"/>
-            <a:r>
-              <a:rPr sz="1300" b="1" i="0">
-                <a:solidFill>
-                  <a:srgbClr val="FFFFFF"/>
-                </a:solidFill>
-                <a:latin typeface="Arial"/>
-              </a:rPr>
-              <a:t>3</a:t>
-            </a:r>
-          </a:p>
-        </p:txBody>
-      </p:sp>
-      <p:sp>
-        <p:nvSpPr>
-          <p:cNvPr id="11" name="TextBox 10"/>
-          <p:cNvSpPr txBox="1"/>
-          <p:nvPr/>
-        </p:nvSpPr>
-        <p:spPr>
-          <a:xfrm>
-            <a:off x="1115568" y="3611879"/>
-            <a:ext cx="10527487" cy="1028699"/>
-          </a:xfrm>
-          <a:prstGeom prst="rect">
-            <a:avLst/>
-          </a:prstGeom>
-          <a:noFill/>
-        </p:spPr>
-        <p:txBody>
-          <a:bodyPr wrap="square">
-            <a:spAutoFit/>
-          </a:bodyPr>
-          <a:lstStyle/>
-          <a:p>
-            <a:pPr>
-              <a:spcAft>
-                <a:spcPts val="300"/>
-              </a:spcAft>
-            </a:pPr>
-            <a:r>
-              <a:rPr sz="1900" b="1" i="0">
-                <a:solidFill>
-                  <a:srgbClr val="1A1A1A"/>
-                </a:solidFill>
-                <a:latin typeface="Arial"/>
-              </a:rPr>
-              <a:t>The ask</a:t>
-            </a:r>
-          </a:p>
-          <a:p>
-            <a:pPr>
-              <a:spcAft>
-                <a:spcPts val="300"/>
-              </a:spcAft>
-            </a:pPr>
-            <a:r>
-              <a:rPr sz="1550" b="0" i="0">
-                <a:solidFill>
-                  <a:srgbClr val="595959"/>
-                </a:solidFill>
-                <a:latin typeface="Arial"/>
-              </a:rPr>
-              <a:t>A small permanent team, a board with real authority, ~2% sustained, protect the team.</a:t>
-            </a:r>
-          </a:p>
-        </p:txBody>
-      </p:sp>
-      <p:sp>
-        <p:nvSpPr>
-          <p:cNvPr id="12" name="Rectangle 11"/>
-          <p:cNvSpPr/>
-          <p:nvPr/>
-        </p:nvSpPr>
-        <p:spPr>
-          <a:xfrm>
-            <a:off x="621792" y="4645152"/>
-            <a:ext cx="10881360" cy="12700"/>
-          </a:xfrm>
-          <a:prstGeom prst="rect">
-            <a:avLst/>
-          </a:prstGeom>
-          <a:solidFill>
-            <a:srgbClr val="DDECF4"/>
-          </a:solidFill>
-          <a:ln>
-            <a:noFill/>
-          </a:ln>
-          <a:effectLst/>
-        </p:spPr>
-        <p:style>
-          <a:lnRef idx="1">
-            <a:schemeClr val="accent1"/>
-          </a:lnRef>
-          <a:fillRef idx="3">
-            <a:schemeClr val="accent1"/>
-          </a:fillRef>
-          <a:effectRef idx="2">
-            <a:schemeClr val="accent1"/>
-          </a:effectRef>
-          <a:fontRef idx="minor">
-            <a:schemeClr val="lt1"/>
-          </a:fontRef>
-        </p:style>
-        <p:txBody>
-          <a:bodyPr rtlCol="0" anchor="ctr"/>
-          <a:lstStyle/>
-          <a:p>
-            <a:pPr algn="ctr"/>
-          </a:p>
-        </p:txBody>
-      </p:sp>
-      <p:sp>
-        <p:nvSpPr>
-          <p:cNvPr id="13" name="Oval 12"/>
-          <p:cNvSpPr/>
-          <p:nvPr/>
-        </p:nvSpPr>
-        <p:spPr>
-          <a:xfrm>
-            <a:off x="621792" y="4732020"/>
-            <a:ext cx="310896" cy="310896"/>
-          </a:xfrm>
-          <a:prstGeom prst="ellipse">
-            <a:avLst/>
-          </a:prstGeom>
-          <a:solidFill>
-            <a:srgbClr val="009CD6"/>
-          </a:solidFill>
-          <a:ln>
-            <a:noFill/>
-          </a:ln>
-          <a:effectLst/>
-        </p:spPr>
-        <p:style>
-          <a:lnRef idx="1">
-            <a:schemeClr val="accent1"/>
-          </a:lnRef>
-          <a:fillRef idx="3">
-            <a:schemeClr val="accent1"/>
-          </a:fillRef>
-          <a:effectRef idx="2">
-            <a:schemeClr val="accent1"/>
-          </a:effectRef>
-          <a:fontRef idx="minor">
-            <a:schemeClr val="lt1"/>
-          </a:fontRef>
-        </p:style>
-        <p:txBody>
-          <a:bodyPr rtlCol="0" anchor="ctr" lIns="0" rIns="0" tIns="0" bIns="0" wrap="square"/>
-          <a:lstStyle/>
-          <a:p>
-            <a:pPr algn="ctr"/>
-            <a:r>
-              <a:rPr sz="1300" b="1" i="0">
-                <a:solidFill>
-                  <a:srgbClr val="FFFFFF"/>
-                </a:solidFill>
-                <a:latin typeface="Arial"/>
-              </a:rPr>
-              <a:t>4</a:t>
-            </a:r>
-          </a:p>
-        </p:txBody>
-      </p:sp>
-      <p:sp>
-        <p:nvSpPr>
-          <p:cNvPr id="14" name="TextBox 13"/>
-          <p:cNvSpPr txBox="1"/>
-          <p:nvPr/>
-        </p:nvSpPr>
-        <p:spPr>
-          <a:xfrm>
-            <a:off x="1115568" y="4686300"/>
-            <a:ext cx="10527487" cy="1028699"/>
-          </a:xfrm>
-          <a:prstGeom prst="rect">
-            <a:avLst/>
-          </a:prstGeom>
-          <a:noFill/>
-        </p:spPr>
-        <p:txBody>
-          <a:bodyPr wrap="square">
-            <a:spAutoFit/>
-          </a:bodyPr>
-          <a:lstStyle/>
-          <a:p>
-            <a:pPr>
-              <a:spcAft>
-                <a:spcPts val="300"/>
-              </a:spcAft>
-            </a:pPr>
-            <a:r>
-              <a:rPr sz="1900" b="1" i="0">
-                <a:solidFill>
-                  <a:srgbClr val="1A1A1A"/>
-                </a:solidFill>
-                <a:latin typeface="Arial"/>
-              </a:rPr>
-              <a:t>The horizon</a:t>
-            </a:r>
-          </a:p>
-          <a:p>
-            <a:pPr>
-              <a:spcAft>
-                <a:spcPts val="300"/>
-              </a:spcAft>
-            </a:pPr>
-            <a:r>
-              <a:rPr sz="1550" b="0" i="0">
-                <a:solidFill>
-                  <a:srgbClr val="595959"/>
-                </a:solidFill>
-                <a:latin typeface="Arial"/>
-              </a:rPr>
-              <a:t>Six months to a roadmap, then a sustained practice.</a:t>
-            </a:r>
-          </a:p>
-        </p:txBody>
-      </p:sp>
-      <p:sp>
-        <p:nvSpPr>
-          <p:cNvPr id="15" name="TextBox 14"/>
-          <p:cNvSpPr txBox="1"/>
-          <p:nvPr/>
-        </p:nvSpPr>
-        <p:spPr>
-          <a:xfrm>
-            <a:off x="658368" y="5870448"/>
-            <a:ext cx="10881360" cy="548640"/>
-          </a:xfrm>
-          <a:prstGeom prst="rect">
-            <a:avLst/>
-          </a:prstGeom>
-          <a:noFill/>
-        </p:spPr>
-        <p:txBody>
-          <a:bodyPr wrap="square">
-            <a:spAutoFit/>
-          </a:bodyPr>
-          <a:lstStyle/>
-          <a:p>
-            <a:r>
-              <a:rPr sz="1550" b="1" i="0">
-                <a:solidFill>
-                  <a:srgbClr val="006E96"/>
-                </a:solidFill>
-                <a:latin typeface="Arial"/>
-              </a:rPr>
-              <a:t>Saving, proof, ask, horizon — a request the minister can defend in cabinet.</a:t>
-            </a:r>
-          </a:p>
-        </p:txBody>
-      </p:sp>
-      <p:sp>
-        <p:nvSpPr>
-          <p:cNvPr id="16" name="TextBox 15"/>
+              <a:t>Bring three things: the saving, the proof, the honest cost.</a:t>
+            </a:r>
+          </a:p>
+        </p:txBody>
+      </p:sp>
+      <p:sp>
+        <p:nvSpPr>
+          <p:cNvPr id="5" name="TextBox 4"/>
           <p:cNvSpPr txBox="1"/>
           <p:nvPr/>
         </p:nvSpPr>
@@ -14048,6 +11953,41 @@
                 <a:latin typeface="Arial"/>
               </a:rPr>
               <a:t>5.4 · Win the commitment — the business case that gets your minister to yes</a:t>
+            </a:r>
+          </a:p>
+        </p:txBody>
+      </p:sp>
+      <p:sp>
+        <p:nvSpPr>
+          <p:cNvPr id="6" name="TextBox 5"/>
+          <p:cNvSpPr txBox="1"/>
+          <p:nvPr/>
+        </p:nvSpPr>
+        <p:spPr>
+          <a:xfrm>
+            <a:off x="10058400" y="6473952"/>
+            <a:ext cx="1673352" cy="292608"/>
+          </a:xfrm>
+          <a:prstGeom prst="rect">
+            <a:avLst/>
+          </a:prstGeom>
+          <a:noFill/>
+        </p:spPr>
+        <p:txBody>
+          <a:bodyPr wrap="square">
+            <a:spAutoFit/>
+          </a:bodyPr>
+          <a:lstStyle/>
+          <a:p>
+            <a:pPr algn="r"/>
+            <a:r>
+              <a:rPr sz="900" b="0" i="0">
+                <a:solidFill>
+                  <a:srgbClr val="595959"/>
+                </a:solidFill>
+                <a:latin typeface="Arial"/>
+              </a:rPr>
+              <a:t>www.itu.int</a:t>
             </a:r>
           </a:p>
         </p:txBody>
@@ -14072,6 +12012,1544 @@
       <p:grpSpPr/>
       <p:sp>
         <p:nvSpPr>
+          <p:cNvPr id="2" name="Rectangle 1"/>
+          <p:cNvSpPr/>
+          <p:nvPr/>
+        </p:nvSpPr>
+        <p:spPr>
+          <a:xfrm>
+            <a:off x="457200" y="384048"/>
+            <a:ext cx="45720" cy="256032"/>
+          </a:xfrm>
+          <a:prstGeom prst="rect">
+            <a:avLst/>
+          </a:prstGeom>
+          <a:solidFill>
+            <a:srgbClr val="009CD6"/>
+          </a:solidFill>
+          <a:ln>
+            <a:noFill/>
+          </a:ln>
+          <a:effectLst/>
+        </p:spPr>
+        <p:style>
+          <a:lnRef idx="1">
+            <a:schemeClr val="accent1"/>
+          </a:lnRef>
+          <a:fillRef idx="3">
+            <a:schemeClr val="accent1"/>
+          </a:fillRef>
+          <a:effectRef idx="2">
+            <a:schemeClr val="accent1"/>
+          </a:effectRef>
+          <a:fontRef idx="minor">
+            <a:schemeClr val="lt1"/>
+          </a:fontRef>
+        </p:style>
+        <p:txBody>
+          <a:bodyPr rtlCol="0" anchor="ctr"/>
+          <a:lstStyle/>
+          <a:p>
+            <a:pPr algn="ctr"/>
+          </a:p>
+        </p:txBody>
+      </p:sp>
+      <p:sp>
+        <p:nvSpPr>
+          <p:cNvPr id="3" name="TextBox 2"/>
+          <p:cNvSpPr txBox="1"/>
+          <p:nvPr/>
+        </p:nvSpPr>
+        <p:spPr>
+          <a:xfrm>
+            <a:off x="621792" y="274320"/>
+            <a:ext cx="11247120" cy="914400"/>
+          </a:xfrm>
+          <a:prstGeom prst="rect">
+            <a:avLst/>
+          </a:prstGeom>
+          <a:noFill/>
+        </p:spPr>
+        <p:txBody>
+          <a:bodyPr wrap="square">
+            <a:spAutoFit/>
+          </a:bodyPr>
+          <a:lstStyle/>
+          <a:p>
+            <a:r>
+              <a:rPr sz="2800" b="1" i="0">
+                <a:solidFill>
+                  <a:srgbClr val="1A1A1A"/>
+                </a:solidFill>
+                <a:latin typeface="Arial"/>
+              </a:rPr>
+              <a:t>Lead with the saving, not the architecture</a:t>
+            </a:r>
+          </a:p>
+        </p:txBody>
+      </p:sp>
+      <p:sp>
+        <p:nvSpPr>
+          <p:cNvPr id="4" name="TextBox 3"/>
+          <p:cNvSpPr txBox="1"/>
+          <p:nvPr/>
+        </p:nvSpPr>
+        <p:spPr>
+          <a:xfrm>
+            <a:off x="658368" y="1600200"/>
+            <a:ext cx="10881360" cy="2194560"/>
+          </a:xfrm>
+          <a:prstGeom prst="rect">
+            <a:avLst/>
+          </a:prstGeom>
+          <a:noFill/>
+        </p:spPr>
+        <p:txBody>
+          <a:bodyPr wrap="square">
+            <a:spAutoFit/>
+          </a:bodyPr>
+          <a:lstStyle/>
+          <a:p>
+            <a:pPr>
+              <a:spcAft>
+                <a:spcPts val="1200"/>
+              </a:spcAft>
+            </a:pPr>
+            <a:r>
+              <a:rPr sz="2000" b="0" i="0">
+                <a:solidFill>
+                  <a:srgbClr val="1A1A1A"/>
+                </a:solidFill>
+                <a:latin typeface="Arial"/>
+              </a:rPr>
+              <a:t>The strongest number you have is the cost of fragmentation: every programme that builds its own identity, its own registry, its own integration means the country pays many times for one thing.</a:t>
+            </a:r>
+          </a:p>
+          <a:p>
+            <a:pPr>
+              <a:spcAft>
+                <a:spcPts val="1200"/>
+              </a:spcAft>
+            </a:pPr>
+            <a:r>
+              <a:rPr sz="2000" b="0" i="0">
+                <a:solidFill>
+                  <a:srgbClr val="1A1A1A"/>
+                </a:solidFill>
+                <a:latin typeface="Arial"/>
+              </a:rPr>
+              <a:t>A whole-of-government business case shows that consuming shared building blocks instead would save a meaningful share of the sectoral digital budget over five years. That number, not the four-layer diagram, opens a cabinet conversation.</a:t>
+            </a:r>
+          </a:p>
+        </p:txBody>
+      </p:sp>
+      <p:sp>
+        <p:nvSpPr>
+          <p:cNvPr id="5" name="Rounded Rectangle 4"/>
+          <p:cNvSpPr/>
+          <p:nvPr/>
+        </p:nvSpPr>
+        <p:spPr>
+          <a:xfrm>
+            <a:off x="658368" y="3977639"/>
+            <a:ext cx="10881360" cy="1325880"/>
+          </a:xfrm>
+          <a:prstGeom prst="roundRect">
+            <a:avLst>
+              <a:gd name="adj" fmla="val 4500"/>
+            </a:avLst>
+          </a:prstGeom>
+          <a:solidFill>
+            <a:srgbClr val="E5F5FB"/>
+          </a:solidFill>
+          <a:ln>
+            <a:noFill/>
+          </a:ln>
+          <a:effectLst/>
+        </p:spPr>
+        <p:style>
+          <a:lnRef idx="1">
+            <a:schemeClr val="accent1"/>
+          </a:lnRef>
+          <a:fillRef idx="3">
+            <a:schemeClr val="accent1"/>
+          </a:fillRef>
+          <a:effectRef idx="2">
+            <a:schemeClr val="accent1"/>
+          </a:effectRef>
+          <a:fontRef idx="minor">
+            <a:schemeClr val="lt1"/>
+          </a:fontRef>
+        </p:style>
+        <p:txBody>
+          <a:bodyPr rtlCol="0" anchor="ctr"/>
+          <a:lstStyle/>
+          <a:p>
+            <a:pPr algn="ctr"/>
+          </a:p>
+        </p:txBody>
+      </p:sp>
+      <p:sp>
+        <p:nvSpPr>
+          <p:cNvPr id="6" name="TextBox 5"/>
+          <p:cNvSpPr txBox="1"/>
+          <p:nvPr/>
+        </p:nvSpPr>
+        <p:spPr>
+          <a:xfrm>
+            <a:off x="859536" y="4169663"/>
+            <a:ext cx="10479024" cy="1051560"/>
+          </a:xfrm>
+          <a:prstGeom prst="rect">
+            <a:avLst/>
+          </a:prstGeom>
+          <a:noFill/>
+        </p:spPr>
+        <p:txBody>
+          <a:bodyPr wrap="square">
+            <a:spAutoFit/>
+          </a:bodyPr>
+          <a:lstStyle/>
+          <a:p>
+            <a:pPr>
+              <a:spcAft>
+                <a:spcPts val="700"/>
+              </a:spcAft>
+            </a:pPr>
+            <a:r>
+              <a:rPr sz="2300" b="1" i="0">
+                <a:solidFill>
+                  <a:srgbClr val="006E96"/>
+                </a:solidFill>
+                <a:latin typeface="Arial"/>
+              </a:rPr>
+              <a:t>The architecture is how you achieve the saving. The saving is what you sell.</a:t>
+            </a:r>
+          </a:p>
+        </p:txBody>
+      </p:sp>
+      <p:sp>
+        <p:nvSpPr>
+          <p:cNvPr id="7" name="TextBox 6"/>
+          <p:cNvSpPr txBox="1"/>
+          <p:nvPr/>
+        </p:nvSpPr>
+        <p:spPr>
+          <a:xfrm>
+            <a:off x="457200" y="6473952"/>
+            <a:ext cx="7772400" cy="292608"/>
+          </a:xfrm>
+          <a:prstGeom prst="rect">
+            <a:avLst/>
+          </a:prstGeom>
+          <a:noFill/>
+        </p:spPr>
+        <p:txBody>
+          <a:bodyPr wrap="square">
+            <a:spAutoFit/>
+          </a:bodyPr>
+          <a:lstStyle/>
+          <a:p>
+            <a:r>
+              <a:rPr sz="900" b="0" i="0">
+                <a:solidFill>
+                  <a:srgbClr val="595959"/>
+                </a:solidFill>
+                <a:latin typeface="Arial"/>
+              </a:rPr>
+              <a:t>5.4 · Win the commitment — the business case that gets your minister to yes</a:t>
+            </a:r>
+          </a:p>
+        </p:txBody>
+      </p:sp>
+    </p:spTree>
+  </p:cSld>
+  <p:clrMapOvr>
+    <a:masterClrMapping/>
+  </p:clrMapOvr>
+</p:sld>
+</file>
+
+<file path=ppt/slides/slide29.xml><?xml version="1.0" encoding="utf-8"?>
+<p:sld xmlns:a="http://schemas.openxmlformats.org/drawingml/2006/main" xmlns:p="http://schemas.openxmlformats.org/presentationml/2006/main" xmlns:r="http://schemas.openxmlformats.org/officeDocument/2006/relationships">
+  <p:cSld>
+    <p:spTree>
+      <p:nvGrpSpPr>
+        <p:cNvPr id="1" name=""/>
+        <p:cNvGrpSpPr/>
+        <p:nvPr/>
+      </p:nvGrpSpPr>
+      <p:grpSpPr/>
+      <p:sp>
+        <p:nvSpPr>
+          <p:cNvPr id="2" name="Rectangle 1"/>
+          <p:cNvSpPr/>
+          <p:nvPr/>
+        </p:nvSpPr>
+        <p:spPr>
+          <a:xfrm>
+            <a:off x="457200" y="384048"/>
+            <a:ext cx="45720" cy="256032"/>
+          </a:xfrm>
+          <a:prstGeom prst="rect">
+            <a:avLst/>
+          </a:prstGeom>
+          <a:solidFill>
+            <a:srgbClr val="009CD6"/>
+          </a:solidFill>
+          <a:ln>
+            <a:noFill/>
+          </a:ln>
+          <a:effectLst/>
+        </p:spPr>
+        <p:style>
+          <a:lnRef idx="1">
+            <a:schemeClr val="accent1"/>
+          </a:lnRef>
+          <a:fillRef idx="3">
+            <a:schemeClr val="accent1"/>
+          </a:fillRef>
+          <a:effectRef idx="2">
+            <a:schemeClr val="accent1"/>
+          </a:effectRef>
+          <a:fontRef idx="minor">
+            <a:schemeClr val="lt1"/>
+          </a:fontRef>
+        </p:style>
+        <p:txBody>
+          <a:bodyPr rtlCol="0" anchor="ctr"/>
+          <a:lstStyle/>
+          <a:p>
+            <a:pPr algn="ctr"/>
+          </a:p>
+        </p:txBody>
+      </p:sp>
+      <p:sp>
+        <p:nvSpPr>
+          <p:cNvPr id="3" name="TextBox 2"/>
+          <p:cNvSpPr txBox="1"/>
+          <p:nvPr/>
+        </p:nvSpPr>
+        <p:spPr>
+          <a:xfrm>
+            <a:off x="621792" y="274320"/>
+            <a:ext cx="11247120" cy="914400"/>
+          </a:xfrm>
+          <a:prstGeom prst="rect">
+            <a:avLst/>
+          </a:prstGeom>
+          <a:noFill/>
+        </p:spPr>
+        <p:txBody>
+          <a:bodyPr wrap="square">
+            <a:spAutoFit/>
+          </a:bodyPr>
+          <a:lstStyle/>
+          <a:p>
+            <a:r>
+              <a:rPr sz="2800" b="1" i="0">
+                <a:solidFill>
+                  <a:srgbClr val="1A1A1A"/>
+                </a:solidFill>
+                <a:latin typeface="Arial"/>
+              </a:rPr>
+              <a:t>Back the number with the proof, because a minister's first worry is risk</a:t>
+            </a:r>
+          </a:p>
+        </p:txBody>
+      </p:sp>
+      <p:sp>
+        <p:nvSpPr>
+          <p:cNvPr id="4" name="TextBox 3"/>
+          <p:cNvSpPr txBox="1"/>
+          <p:nvPr/>
+        </p:nvSpPr>
+        <p:spPr>
+          <a:xfrm>
+            <a:off x="658368" y="1600200"/>
+            <a:ext cx="10881360" cy="2194560"/>
+          </a:xfrm>
+          <a:prstGeom prst="rect">
+            <a:avLst/>
+          </a:prstGeom>
+          <a:noFill/>
+        </p:spPr>
+        <p:txBody>
+          <a:bodyPr wrap="square">
+            <a:spAutoFit/>
+          </a:bodyPr>
+          <a:lstStyle/>
+          <a:p>
+            <a:pPr>
+              <a:spcAft>
+                <a:spcPts val="1200"/>
+              </a:spcAft>
+            </a:pPr>
+            <a:r>
+              <a:rPr sz="2000" b="0" i="0">
+                <a:solidFill>
+                  <a:srgbClr val="1A1A1A"/>
+                </a:solidFill>
+                <a:latin typeface="Arial"/>
+              </a:rPr>
+              <a:t>A saving that depends on an untested approach is easy to refuse. A saving backed by four governments that have already built the same pattern is much harder to wave away.</a:t>
+            </a:r>
+          </a:p>
+          <a:p>
+            <a:pPr>
+              <a:spcAft>
+                <a:spcPts val="1200"/>
+              </a:spcAft>
+            </a:pPr>
+            <a:r>
+              <a:rPr sz="2000" b="0" i="0">
+                <a:solidFill>
+                  <a:srgbClr val="1A1A1A"/>
+                </a:solidFill>
+                <a:latin typeface="Arial"/>
+              </a:rPr>
+              <a:t>This is a charted path that countries like yours have walked, with the obstacles documented.</a:t>
+            </a:r>
+          </a:p>
+        </p:txBody>
+      </p:sp>
+      <p:sp>
+        <p:nvSpPr>
+          <p:cNvPr id="5" name="Rounded Rectangle 4"/>
+          <p:cNvSpPr/>
+          <p:nvPr/>
+        </p:nvSpPr>
+        <p:spPr>
+          <a:xfrm>
+            <a:off x="658368" y="3977639"/>
+            <a:ext cx="10881360" cy="1325880"/>
+          </a:xfrm>
+          <a:prstGeom prst="roundRect">
+            <a:avLst>
+              <a:gd name="adj" fmla="val 4500"/>
+            </a:avLst>
+          </a:prstGeom>
+          <a:solidFill>
+            <a:srgbClr val="E5F5FB"/>
+          </a:solidFill>
+          <a:ln>
+            <a:noFill/>
+          </a:ln>
+          <a:effectLst/>
+        </p:spPr>
+        <p:style>
+          <a:lnRef idx="1">
+            <a:schemeClr val="accent1"/>
+          </a:lnRef>
+          <a:fillRef idx="3">
+            <a:schemeClr val="accent1"/>
+          </a:fillRef>
+          <a:effectRef idx="2">
+            <a:schemeClr val="accent1"/>
+          </a:effectRef>
+          <a:fontRef idx="minor">
+            <a:schemeClr val="lt1"/>
+          </a:fontRef>
+        </p:style>
+        <p:txBody>
+          <a:bodyPr rtlCol="0" anchor="ctr"/>
+          <a:lstStyle/>
+          <a:p>
+            <a:pPr algn="ctr"/>
+          </a:p>
+        </p:txBody>
+      </p:sp>
+      <p:sp>
+        <p:nvSpPr>
+          <p:cNvPr id="6" name="TextBox 5"/>
+          <p:cNvSpPr txBox="1"/>
+          <p:nvPr/>
+        </p:nvSpPr>
+        <p:spPr>
+          <a:xfrm>
+            <a:off x="859536" y="4169663"/>
+            <a:ext cx="10479024" cy="1051560"/>
+          </a:xfrm>
+          <a:prstGeom prst="rect">
+            <a:avLst/>
+          </a:prstGeom>
+          <a:noFill/>
+        </p:spPr>
+        <p:txBody>
+          <a:bodyPr wrap="square">
+            <a:spAutoFit/>
+          </a:bodyPr>
+          <a:lstStyle/>
+          <a:p>
+            <a:pPr>
+              <a:spcAft>
+                <a:spcPts val="700"/>
+              </a:spcAft>
+            </a:pPr>
+            <a:r>
+              <a:rPr sz="2300" b="1" i="0">
+                <a:solidFill>
+                  <a:srgbClr val="006E96"/>
+                </a:solidFill>
+                <a:latin typeface="Arial"/>
+              </a:rPr>
+              <a:t>Not a bet on a theory — a saving others have already proven is real.</a:t>
+            </a:r>
+          </a:p>
+        </p:txBody>
+      </p:sp>
+      <p:sp>
+        <p:nvSpPr>
+          <p:cNvPr id="7" name="TextBox 6"/>
+          <p:cNvSpPr txBox="1"/>
+          <p:nvPr/>
+        </p:nvSpPr>
+        <p:spPr>
+          <a:xfrm>
+            <a:off x="457200" y="6473952"/>
+            <a:ext cx="7772400" cy="292608"/>
+          </a:xfrm>
+          <a:prstGeom prst="rect">
+            <a:avLst/>
+          </a:prstGeom>
+          <a:noFill/>
+        </p:spPr>
+        <p:txBody>
+          <a:bodyPr wrap="square">
+            <a:spAutoFit/>
+          </a:bodyPr>
+          <a:lstStyle/>
+          <a:p>
+            <a:r>
+              <a:rPr sz="900" b="0" i="0">
+                <a:solidFill>
+                  <a:srgbClr val="595959"/>
+                </a:solidFill>
+                <a:latin typeface="Arial"/>
+              </a:rPr>
+              <a:t>5.4 · Win the commitment — the business case that gets your minister to yes</a:t>
+            </a:r>
+          </a:p>
+        </p:txBody>
+      </p:sp>
+    </p:spTree>
+  </p:cSld>
+  <p:clrMapOvr>
+    <a:masterClrMapping/>
+  </p:clrMapOvr>
+</p:sld>
+</file>
+
+<file path=ppt/slides/slide30.xml><?xml version="1.0" encoding="utf-8"?>
+<p:sld xmlns:a="http://schemas.openxmlformats.org/drawingml/2006/main" xmlns:p="http://schemas.openxmlformats.org/presentationml/2006/main" xmlns:r="http://schemas.openxmlformats.org/officeDocument/2006/relationships">
+  <p:cSld>
+    <p:spTree>
+      <p:nvGrpSpPr>
+        <p:cNvPr id="1" name=""/>
+        <p:cNvGrpSpPr/>
+        <p:nvPr/>
+      </p:nvGrpSpPr>
+      <p:grpSpPr/>
+      <p:sp>
+        <p:nvSpPr>
+          <p:cNvPr id="2" name="Rectangle 1"/>
+          <p:cNvSpPr/>
+          <p:nvPr/>
+        </p:nvSpPr>
+        <p:spPr>
+          <a:xfrm>
+            <a:off x="457200" y="384048"/>
+            <a:ext cx="45720" cy="256032"/>
+          </a:xfrm>
+          <a:prstGeom prst="rect">
+            <a:avLst/>
+          </a:prstGeom>
+          <a:solidFill>
+            <a:srgbClr val="009CD6"/>
+          </a:solidFill>
+          <a:ln>
+            <a:noFill/>
+          </a:ln>
+          <a:effectLst/>
+        </p:spPr>
+        <p:style>
+          <a:lnRef idx="1">
+            <a:schemeClr val="accent1"/>
+          </a:lnRef>
+          <a:fillRef idx="3">
+            <a:schemeClr val="accent1"/>
+          </a:fillRef>
+          <a:effectRef idx="2">
+            <a:schemeClr val="accent1"/>
+          </a:effectRef>
+          <a:fontRef idx="minor">
+            <a:schemeClr val="lt1"/>
+          </a:fontRef>
+        </p:style>
+        <p:txBody>
+          <a:bodyPr rtlCol="0" anchor="ctr"/>
+          <a:lstStyle/>
+          <a:p>
+            <a:pPr algn="ctr"/>
+          </a:p>
+        </p:txBody>
+      </p:sp>
+      <p:sp>
+        <p:nvSpPr>
+          <p:cNvPr id="3" name="TextBox 2"/>
+          <p:cNvSpPr txBox="1"/>
+          <p:nvPr/>
+        </p:nvSpPr>
+        <p:spPr>
+          <a:xfrm>
+            <a:off x="621792" y="274320"/>
+            <a:ext cx="11247120" cy="914400"/>
+          </a:xfrm>
+          <a:prstGeom prst="rect">
+            <a:avLst/>
+          </a:prstGeom>
+          <a:noFill/>
+        </p:spPr>
+        <p:txBody>
+          <a:bodyPr wrap="square">
+            <a:spAutoFit/>
+          </a:bodyPr>
+          <a:lstStyle/>
+          <a:p>
+            <a:r>
+              <a:rPr sz="2800" b="1" i="0">
+                <a:solidFill>
+                  <a:srgbClr val="1A1A1A"/>
+                </a:solidFill>
+                <a:latin typeface="Arial"/>
+              </a:rPr>
+              <a:t>Ministers fund people who tell them the real timeline</a:t>
+            </a:r>
+          </a:p>
+        </p:txBody>
+      </p:sp>
+      <p:sp>
+        <p:nvSpPr>
+          <p:cNvPr id="4" name="TextBox 3"/>
+          <p:cNvSpPr txBox="1"/>
+          <p:nvPr/>
+        </p:nvSpPr>
+        <p:spPr>
+          <a:xfrm>
+            <a:off x="658368" y="1600200"/>
+            <a:ext cx="10881360" cy="2194560"/>
+          </a:xfrm>
+          <a:prstGeom prst="rect">
+            <a:avLst/>
+          </a:prstGeom>
+          <a:noFill/>
+        </p:spPr>
+        <p:txBody>
+          <a:bodyPr wrap="square">
+            <a:spAutoFit/>
+          </a:bodyPr>
+          <a:lstStyle/>
+          <a:p>
+            <a:pPr>
+              <a:spcAft>
+                <a:spcPts val="1200"/>
+              </a:spcAft>
+            </a:pPr>
+            <a:r>
+              <a:rPr sz="2000" b="0" i="0">
+                <a:solidFill>
+                  <a:srgbClr val="1A1A1A"/>
+                </a:solidFill>
+                <a:latin typeface="Arial"/>
+              </a:rPr>
+              <a:t>Name the real cost: a small permanent team and governance, typically around two per cent of the digital-government budget, sustained for five years.</a:t>
+            </a:r>
+          </a:p>
+          <a:p>
+            <a:pPr>
+              <a:spcAft>
+                <a:spcPts val="1200"/>
+              </a:spcAft>
+            </a:pPr>
+            <a:r>
+              <a:rPr sz="2000" b="0" i="0">
+                <a:solidFill>
+                  <a:srgbClr val="1A1A1A"/>
+                </a:solidFill>
+                <a:latin typeface="Arial"/>
+              </a:rPr>
+              <a:t>And the real horizon: about six months to a roadmap the minister can show, but years to full maturity — so the minister who launches this will likely not be the one who completes it.</a:t>
+            </a:r>
+          </a:p>
+        </p:txBody>
+      </p:sp>
+      <p:sp>
+        <p:nvSpPr>
+          <p:cNvPr id="5" name="Rounded Rectangle 4"/>
+          <p:cNvSpPr/>
+          <p:nvPr/>
+        </p:nvSpPr>
+        <p:spPr>
+          <a:xfrm>
+            <a:off x="658368" y="3977639"/>
+            <a:ext cx="10881360" cy="1325880"/>
+          </a:xfrm>
+          <a:prstGeom prst="roundRect">
+            <a:avLst>
+              <a:gd name="adj" fmla="val 4500"/>
+            </a:avLst>
+          </a:prstGeom>
+          <a:solidFill>
+            <a:srgbClr val="E5F5FB"/>
+          </a:solidFill>
+          <a:ln>
+            <a:noFill/>
+          </a:ln>
+          <a:effectLst/>
+        </p:spPr>
+        <p:style>
+          <a:lnRef idx="1">
+            <a:schemeClr val="accent1"/>
+          </a:lnRef>
+          <a:fillRef idx="3">
+            <a:schemeClr val="accent1"/>
+          </a:fillRef>
+          <a:effectRef idx="2">
+            <a:schemeClr val="accent1"/>
+          </a:effectRef>
+          <a:fontRef idx="minor">
+            <a:schemeClr val="lt1"/>
+          </a:fontRef>
+        </p:style>
+        <p:txBody>
+          <a:bodyPr rtlCol="0" anchor="ctr"/>
+          <a:lstStyle/>
+          <a:p>
+            <a:pPr algn="ctr"/>
+          </a:p>
+        </p:txBody>
+      </p:sp>
+      <p:sp>
+        <p:nvSpPr>
+          <p:cNvPr id="6" name="TextBox 5"/>
+          <p:cNvSpPr txBox="1"/>
+          <p:nvPr/>
+        </p:nvSpPr>
+        <p:spPr>
+          <a:xfrm>
+            <a:off x="859536" y="4169663"/>
+            <a:ext cx="10479024" cy="1051560"/>
+          </a:xfrm>
+          <a:prstGeom prst="rect">
+            <a:avLst/>
+          </a:prstGeom>
+          <a:noFill/>
+        </p:spPr>
+        <p:txBody>
+          <a:bodyPr wrap="square">
+            <a:spAutoFit/>
+          </a:bodyPr>
+          <a:lstStyle/>
+          <a:p>
+            <a:pPr>
+              <a:spcAft>
+                <a:spcPts val="700"/>
+              </a:spcAft>
+            </a:pPr>
+            <a:r>
+              <a:rPr sz="2300" b="1" i="0">
+                <a:solidFill>
+                  <a:srgbClr val="006E96"/>
+                </a:solidFill>
+                <a:latin typeface="Arial"/>
+              </a:rPr>
+              <a:t>Said as a weakness, that sinks the case. Said as the truth, it wins it.</a:t>
+            </a:r>
+          </a:p>
+        </p:txBody>
+      </p:sp>
+      <p:sp>
+        <p:nvSpPr>
+          <p:cNvPr id="7" name="TextBox 6"/>
+          <p:cNvSpPr txBox="1"/>
+          <p:nvPr/>
+        </p:nvSpPr>
+        <p:spPr>
+          <a:xfrm>
+            <a:off x="457200" y="6473952"/>
+            <a:ext cx="7772400" cy="292608"/>
+          </a:xfrm>
+          <a:prstGeom prst="rect">
+            <a:avLst/>
+          </a:prstGeom>
+          <a:noFill/>
+        </p:spPr>
+        <p:txBody>
+          <a:bodyPr wrap="square">
+            <a:spAutoFit/>
+          </a:bodyPr>
+          <a:lstStyle/>
+          <a:p>
+            <a:r>
+              <a:rPr sz="900" b="0" i="0">
+                <a:solidFill>
+                  <a:srgbClr val="595959"/>
+                </a:solidFill>
+                <a:latin typeface="Arial"/>
+              </a:rPr>
+              <a:t>5.4 · Win the commitment — the business case that gets your minister to yes</a:t>
+            </a:r>
+          </a:p>
+        </p:txBody>
+      </p:sp>
+    </p:spTree>
+  </p:cSld>
+  <p:clrMapOvr>
+    <a:masterClrMapping/>
+  </p:clrMapOvr>
+</p:sld>
+</file>
+
+<file path=ppt/slides/slide31.xml><?xml version="1.0" encoding="utf-8"?>
+<p:sld xmlns:a="http://schemas.openxmlformats.org/drawingml/2006/main" xmlns:p="http://schemas.openxmlformats.org/presentationml/2006/main" xmlns:r="http://schemas.openxmlformats.org/officeDocument/2006/relationships">
+  <p:cSld>
+    <p:spTree>
+      <p:nvGrpSpPr>
+        <p:cNvPr id="1" name=""/>
+        <p:cNvGrpSpPr/>
+        <p:nvPr/>
+      </p:nvGrpSpPr>
+      <p:grpSpPr/>
+      <p:sp>
+        <p:nvSpPr>
+          <p:cNvPr id="2" name="Rectangle 1"/>
+          <p:cNvSpPr/>
+          <p:nvPr/>
+        </p:nvSpPr>
+        <p:spPr>
+          <a:xfrm>
+            <a:off x="457200" y="384048"/>
+            <a:ext cx="45720" cy="256032"/>
+          </a:xfrm>
+          <a:prstGeom prst="rect">
+            <a:avLst/>
+          </a:prstGeom>
+          <a:solidFill>
+            <a:srgbClr val="009CD6"/>
+          </a:solidFill>
+          <a:ln>
+            <a:noFill/>
+          </a:ln>
+          <a:effectLst/>
+        </p:spPr>
+        <p:style>
+          <a:lnRef idx="1">
+            <a:schemeClr val="accent1"/>
+          </a:lnRef>
+          <a:fillRef idx="3">
+            <a:schemeClr val="accent1"/>
+          </a:fillRef>
+          <a:effectRef idx="2">
+            <a:schemeClr val="accent1"/>
+          </a:effectRef>
+          <a:fontRef idx="minor">
+            <a:schemeClr val="lt1"/>
+          </a:fontRef>
+        </p:style>
+        <p:txBody>
+          <a:bodyPr rtlCol="0" anchor="ctr"/>
+          <a:lstStyle/>
+          <a:p>
+            <a:pPr algn="ctr"/>
+          </a:p>
+        </p:txBody>
+      </p:sp>
+      <p:sp>
+        <p:nvSpPr>
+          <p:cNvPr id="3" name="TextBox 2"/>
+          <p:cNvSpPr txBox="1"/>
+          <p:nvPr/>
+        </p:nvSpPr>
+        <p:spPr>
+          <a:xfrm>
+            <a:off x="621792" y="274320"/>
+            <a:ext cx="11247120" cy="914400"/>
+          </a:xfrm>
+          <a:prstGeom prst="rect">
+            <a:avLst/>
+          </a:prstGeom>
+          <a:noFill/>
+        </p:spPr>
+        <p:txBody>
+          <a:bodyPr wrap="square">
+            <a:spAutoFit/>
+          </a:bodyPr>
+          <a:lstStyle/>
+          <a:p>
+            <a:r>
+              <a:rPr sz="2800" b="1" i="0">
+                <a:solidFill>
+                  <a:srgbClr val="1A1A1A"/>
+                </a:solidFill>
+                <a:latin typeface="Arial"/>
+              </a:rPr>
+              <a:t>The one page, in the order a minister reads it</a:t>
+            </a:r>
+          </a:p>
+        </p:txBody>
+      </p:sp>
+      <p:sp>
+        <p:nvSpPr>
+          <p:cNvPr id="4" name="Oval 3"/>
+          <p:cNvSpPr/>
+          <p:nvPr/>
+        </p:nvSpPr>
+        <p:spPr>
+          <a:xfrm>
+            <a:off x="621792" y="1508760"/>
+            <a:ext cx="310896" cy="310896"/>
+          </a:xfrm>
+          <a:prstGeom prst="ellipse">
+            <a:avLst/>
+          </a:prstGeom>
+          <a:solidFill>
+            <a:srgbClr val="009CD6"/>
+          </a:solidFill>
+          <a:ln>
+            <a:noFill/>
+          </a:ln>
+          <a:effectLst/>
+        </p:spPr>
+        <p:style>
+          <a:lnRef idx="1">
+            <a:schemeClr val="accent1"/>
+          </a:lnRef>
+          <a:fillRef idx="3">
+            <a:schemeClr val="accent1"/>
+          </a:fillRef>
+          <a:effectRef idx="2">
+            <a:schemeClr val="accent1"/>
+          </a:effectRef>
+          <a:fontRef idx="minor">
+            <a:schemeClr val="lt1"/>
+          </a:fontRef>
+        </p:style>
+        <p:txBody>
+          <a:bodyPr rtlCol="0" anchor="ctr" lIns="0" rIns="0" tIns="0" bIns="0" wrap="square"/>
+          <a:lstStyle/>
+          <a:p>
+            <a:pPr algn="ctr"/>
+            <a:r>
+              <a:rPr sz="1300" b="1" i="0">
+                <a:solidFill>
+                  <a:srgbClr val="FFFFFF"/>
+                </a:solidFill>
+                <a:latin typeface="Arial"/>
+              </a:rPr>
+              <a:t>1</a:t>
+            </a:r>
+          </a:p>
+        </p:txBody>
+      </p:sp>
+      <p:sp>
+        <p:nvSpPr>
+          <p:cNvPr id="5" name="TextBox 4"/>
+          <p:cNvSpPr txBox="1"/>
+          <p:nvPr/>
+        </p:nvSpPr>
+        <p:spPr>
+          <a:xfrm>
+            <a:off x="1115568" y="1463040"/>
+            <a:ext cx="10527487" cy="1028699"/>
+          </a:xfrm>
+          <a:prstGeom prst="rect">
+            <a:avLst/>
+          </a:prstGeom>
+          <a:noFill/>
+        </p:spPr>
+        <p:txBody>
+          <a:bodyPr wrap="square">
+            <a:spAutoFit/>
+          </a:bodyPr>
+          <a:lstStyle/>
+          <a:p>
+            <a:pPr>
+              <a:spcAft>
+                <a:spcPts val="300"/>
+              </a:spcAft>
+            </a:pPr>
+            <a:r>
+              <a:rPr sz="1900" b="1" i="0">
+                <a:solidFill>
+                  <a:srgbClr val="1A1A1A"/>
+                </a:solidFill>
+                <a:latin typeface="Arial"/>
+              </a:rPr>
+              <a:t>The saving</a:t>
+            </a:r>
+          </a:p>
+          <a:p>
+            <a:pPr>
+              <a:spcAft>
+                <a:spcPts val="300"/>
+              </a:spcAft>
+            </a:pPr>
+            <a:r>
+              <a:rPr sz="1550" b="0" i="0">
+                <a:solidFill>
+                  <a:srgbClr val="595959"/>
+                </a:solidFill>
+                <a:latin typeface="Arial"/>
+              </a:rPr>
+              <a:t>The country-level number over five years.</a:t>
+            </a:r>
+          </a:p>
+        </p:txBody>
+      </p:sp>
+      <p:sp>
+        <p:nvSpPr>
+          <p:cNvPr id="6" name="Rectangle 5"/>
+          <p:cNvSpPr/>
+          <p:nvPr/>
+        </p:nvSpPr>
+        <p:spPr>
+          <a:xfrm>
+            <a:off x="621792" y="2496312"/>
+            <a:ext cx="10881360" cy="12700"/>
+          </a:xfrm>
+          <a:prstGeom prst="rect">
+            <a:avLst/>
+          </a:prstGeom>
+          <a:solidFill>
+            <a:srgbClr val="DDECF4"/>
+          </a:solidFill>
+          <a:ln>
+            <a:noFill/>
+          </a:ln>
+          <a:effectLst/>
+        </p:spPr>
+        <p:style>
+          <a:lnRef idx="1">
+            <a:schemeClr val="accent1"/>
+          </a:lnRef>
+          <a:fillRef idx="3">
+            <a:schemeClr val="accent1"/>
+          </a:fillRef>
+          <a:effectRef idx="2">
+            <a:schemeClr val="accent1"/>
+          </a:effectRef>
+          <a:fontRef idx="minor">
+            <a:schemeClr val="lt1"/>
+          </a:fontRef>
+        </p:style>
+        <p:txBody>
+          <a:bodyPr rtlCol="0" anchor="ctr"/>
+          <a:lstStyle/>
+          <a:p>
+            <a:pPr algn="ctr"/>
+          </a:p>
+        </p:txBody>
+      </p:sp>
+      <p:sp>
+        <p:nvSpPr>
+          <p:cNvPr id="7" name="Oval 6"/>
+          <p:cNvSpPr/>
+          <p:nvPr/>
+        </p:nvSpPr>
+        <p:spPr>
+          <a:xfrm>
+            <a:off x="621792" y="2583179"/>
+            <a:ext cx="310896" cy="310896"/>
+          </a:xfrm>
+          <a:prstGeom prst="ellipse">
+            <a:avLst/>
+          </a:prstGeom>
+          <a:solidFill>
+            <a:srgbClr val="009CD6"/>
+          </a:solidFill>
+          <a:ln>
+            <a:noFill/>
+          </a:ln>
+          <a:effectLst/>
+        </p:spPr>
+        <p:style>
+          <a:lnRef idx="1">
+            <a:schemeClr val="accent1"/>
+          </a:lnRef>
+          <a:fillRef idx="3">
+            <a:schemeClr val="accent1"/>
+          </a:fillRef>
+          <a:effectRef idx="2">
+            <a:schemeClr val="accent1"/>
+          </a:effectRef>
+          <a:fontRef idx="minor">
+            <a:schemeClr val="lt1"/>
+          </a:fontRef>
+        </p:style>
+        <p:txBody>
+          <a:bodyPr rtlCol="0" anchor="ctr" lIns="0" rIns="0" tIns="0" bIns="0" wrap="square"/>
+          <a:lstStyle/>
+          <a:p>
+            <a:pPr algn="ctr"/>
+            <a:r>
+              <a:rPr sz="1300" b="1" i="0">
+                <a:solidFill>
+                  <a:srgbClr val="FFFFFF"/>
+                </a:solidFill>
+                <a:latin typeface="Arial"/>
+              </a:rPr>
+              <a:t>2</a:t>
+            </a:r>
+          </a:p>
+        </p:txBody>
+      </p:sp>
+      <p:sp>
+        <p:nvSpPr>
+          <p:cNvPr id="8" name="TextBox 7"/>
+          <p:cNvSpPr txBox="1"/>
+          <p:nvPr/>
+        </p:nvSpPr>
+        <p:spPr>
+          <a:xfrm>
+            <a:off x="1115568" y="2537460"/>
+            <a:ext cx="10527487" cy="1028699"/>
+          </a:xfrm>
+          <a:prstGeom prst="rect">
+            <a:avLst/>
+          </a:prstGeom>
+          <a:noFill/>
+        </p:spPr>
+        <p:txBody>
+          <a:bodyPr wrap="square">
+            <a:spAutoFit/>
+          </a:bodyPr>
+          <a:lstStyle/>
+          <a:p>
+            <a:pPr>
+              <a:spcAft>
+                <a:spcPts val="300"/>
+              </a:spcAft>
+            </a:pPr>
+            <a:r>
+              <a:rPr sz="1900" b="1" i="0">
+                <a:solidFill>
+                  <a:srgbClr val="1A1A1A"/>
+                </a:solidFill>
+                <a:latin typeface="Arial"/>
+              </a:rPr>
+              <a:t>The proof</a:t>
+            </a:r>
+          </a:p>
+          <a:p>
+            <a:pPr>
+              <a:spcAft>
+                <a:spcPts val="300"/>
+              </a:spcAft>
+            </a:pPr>
+            <a:r>
+              <a:rPr sz="1550" b="0" i="0">
+                <a:solidFill>
+                  <a:srgbClr val="595959"/>
+                </a:solidFill>
+                <a:latin typeface="Arial"/>
+              </a:rPr>
+              <a:t>The governments that have already done it.</a:t>
+            </a:r>
+          </a:p>
+        </p:txBody>
+      </p:sp>
+      <p:sp>
+        <p:nvSpPr>
+          <p:cNvPr id="9" name="Rectangle 8"/>
+          <p:cNvSpPr/>
+          <p:nvPr/>
+        </p:nvSpPr>
+        <p:spPr>
+          <a:xfrm>
+            <a:off x="621792" y="3570732"/>
+            <a:ext cx="10881360" cy="12700"/>
+          </a:xfrm>
+          <a:prstGeom prst="rect">
+            <a:avLst/>
+          </a:prstGeom>
+          <a:solidFill>
+            <a:srgbClr val="DDECF4"/>
+          </a:solidFill>
+          <a:ln>
+            <a:noFill/>
+          </a:ln>
+          <a:effectLst/>
+        </p:spPr>
+        <p:style>
+          <a:lnRef idx="1">
+            <a:schemeClr val="accent1"/>
+          </a:lnRef>
+          <a:fillRef idx="3">
+            <a:schemeClr val="accent1"/>
+          </a:fillRef>
+          <a:effectRef idx="2">
+            <a:schemeClr val="accent1"/>
+          </a:effectRef>
+          <a:fontRef idx="minor">
+            <a:schemeClr val="lt1"/>
+          </a:fontRef>
+        </p:style>
+        <p:txBody>
+          <a:bodyPr rtlCol="0" anchor="ctr"/>
+          <a:lstStyle/>
+          <a:p>
+            <a:pPr algn="ctr"/>
+          </a:p>
+        </p:txBody>
+      </p:sp>
+      <p:sp>
+        <p:nvSpPr>
+          <p:cNvPr id="10" name="Oval 9"/>
+          <p:cNvSpPr/>
+          <p:nvPr/>
+        </p:nvSpPr>
+        <p:spPr>
+          <a:xfrm>
+            <a:off x="621792" y="3657599"/>
+            <a:ext cx="310896" cy="310896"/>
+          </a:xfrm>
+          <a:prstGeom prst="ellipse">
+            <a:avLst/>
+          </a:prstGeom>
+          <a:solidFill>
+            <a:srgbClr val="009CD6"/>
+          </a:solidFill>
+          <a:ln>
+            <a:noFill/>
+          </a:ln>
+          <a:effectLst/>
+        </p:spPr>
+        <p:style>
+          <a:lnRef idx="1">
+            <a:schemeClr val="accent1"/>
+          </a:lnRef>
+          <a:fillRef idx="3">
+            <a:schemeClr val="accent1"/>
+          </a:fillRef>
+          <a:effectRef idx="2">
+            <a:schemeClr val="accent1"/>
+          </a:effectRef>
+          <a:fontRef idx="minor">
+            <a:schemeClr val="lt1"/>
+          </a:fontRef>
+        </p:style>
+        <p:txBody>
+          <a:bodyPr rtlCol="0" anchor="ctr" lIns="0" rIns="0" tIns="0" bIns="0" wrap="square"/>
+          <a:lstStyle/>
+          <a:p>
+            <a:pPr algn="ctr"/>
+            <a:r>
+              <a:rPr sz="1300" b="1" i="0">
+                <a:solidFill>
+                  <a:srgbClr val="FFFFFF"/>
+                </a:solidFill>
+                <a:latin typeface="Arial"/>
+              </a:rPr>
+              <a:t>3</a:t>
+            </a:r>
+          </a:p>
+        </p:txBody>
+      </p:sp>
+      <p:sp>
+        <p:nvSpPr>
+          <p:cNvPr id="11" name="TextBox 10"/>
+          <p:cNvSpPr txBox="1"/>
+          <p:nvPr/>
+        </p:nvSpPr>
+        <p:spPr>
+          <a:xfrm>
+            <a:off x="1115568" y="3611879"/>
+            <a:ext cx="10527487" cy="1028699"/>
+          </a:xfrm>
+          <a:prstGeom prst="rect">
+            <a:avLst/>
+          </a:prstGeom>
+          <a:noFill/>
+        </p:spPr>
+        <p:txBody>
+          <a:bodyPr wrap="square">
+            <a:spAutoFit/>
+          </a:bodyPr>
+          <a:lstStyle/>
+          <a:p>
+            <a:pPr>
+              <a:spcAft>
+                <a:spcPts val="300"/>
+              </a:spcAft>
+            </a:pPr>
+            <a:r>
+              <a:rPr sz="1900" b="1" i="0">
+                <a:solidFill>
+                  <a:srgbClr val="1A1A1A"/>
+                </a:solidFill>
+                <a:latin typeface="Arial"/>
+              </a:rPr>
+              <a:t>The ask</a:t>
+            </a:r>
+          </a:p>
+          <a:p>
+            <a:pPr>
+              <a:spcAft>
+                <a:spcPts val="300"/>
+              </a:spcAft>
+            </a:pPr>
+            <a:r>
+              <a:rPr sz="1550" b="0" i="0">
+                <a:solidFill>
+                  <a:srgbClr val="595959"/>
+                </a:solidFill>
+                <a:latin typeface="Arial"/>
+              </a:rPr>
+              <a:t>A small permanent team, a board with real authority, ~2% sustained, protect the team.</a:t>
+            </a:r>
+          </a:p>
+        </p:txBody>
+      </p:sp>
+      <p:sp>
+        <p:nvSpPr>
+          <p:cNvPr id="12" name="Rectangle 11"/>
+          <p:cNvSpPr/>
+          <p:nvPr/>
+        </p:nvSpPr>
+        <p:spPr>
+          <a:xfrm>
+            <a:off x="621792" y="4645152"/>
+            <a:ext cx="10881360" cy="12700"/>
+          </a:xfrm>
+          <a:prstGeom prst="rect">
+            <a:avLst/>
+          </a:prstGeom>
+          <a:solidFill>
+            <a:srgbClr val="DDECF4"/>
+          </a:solidFill>
+          <a:ln>
+            <a:noFill/>
+          </a:ln>
+          <a:effectLst/>
+        </p:spPr>
+        <p:style>
+          <a:lnRef idx="1">
+            <a:schemeClr val="accent1"/>
+          </a:lnRef>
+          <a:fillRef idx="3">
+            <a:schemeClr val="accent1"/>
+          </a:fillRef>
+          <a:effectRef idx="2">
+            <a:schemeClr val="accent1"/>
+          </a:effectRef>
+          <a:fontRef idx="minor">
+            <a:schemeClr val="lt1"/>
+          </a:fontRef>
+        </p:style>
+        <p:txBody>
+          <a:bodyPr rtlCol="0" anchor="ctr"/>
+          <a:lstStyle/>
+          <a:p>
+            <a:pPr algn="ctr"/>
+          </a:p>
+        </p:txBody>
+      </p:sp>
+      <p:sp>
+        <p:nvSpPr>
+          <p:cNvPr id="13" name="Oval 12"/>
+          <p:cNvSpPr/>
+          <p:nvPr/>
+        </p:nvSpPr>
+        <p:spPr>
+          <a:xfrm>
+            <a:off x="621792" y="4732020"/>
+            <a:ext cx="310896" cy="310896"/>
+          </a:xfrm>
+          <a:prstGeom prst="ellipse">
+            <a:avLst/>
+          </a:prstGeom>
+          <a:solidFill>
+            <a:srgbClr val="009CD6"/>
+          </a:solidFill>
+          <a:ln>
+            <a:noFill/>
+          </a:ln>
+          <a:effectLst/>
+        </p:spPr>
+        <p:style>
+          <a:lnRef idx="1">
+            <a:schemeClr val="accent1"/>
+          </a:lnRef>
+          <a:fillRef idx="3">
+            <a:schemeClr val="accent1"/>
+          </a:fillRef>
+          <a:effectRef idx="2">
+            <a:schemeClr val="accent1"/>
+          </a:effectRef>
+          <a:fontRef idx="minor">
+            <a:schemeClr val="lt1"/>
+          </a:fontRef>
+        </p:style>
+        <p:txBody>
+          <a:bodyPr rtlCol="0" anchor="ctr" lIns="0" rIns="0" tIns="0" bIns="0" wrap="square"/>
+          <a:lstStyle/>
+          <a:p>
+            <a:pPr algn="ctr"/>
+            <a:r>
+              <a:rPr sz="1300" b="1" i="0">
+                <a:solidFill>
+                  <a:srgbClr val="FFFFFF"/>
+                </a:solidFill>
+                <a:latin typeface="Arial"/>
+              </a:rPr>
+              <a:t>4</a:t>
+            </a:r>
+          </a:p>
+        </p:txBody>
+      </p:sp>
+      <p:sp>
+        <p:nvSpPr>
+          <p:cNvPr id="14" name="TextBox 13"/>
+          <p:cNvSpPr txBox="1"/>
+          <p:nvPr/>
+        </p:nvSpPr>
+        <p:spPr>
+          <a:xfrm>
+            <a:off x="1115568" y="4686300"/>
+            <a:ext cx="10527487" cy="1028699"/>
+          </a:xfrm>
+          <a:prstGeom prst="rect">
+            <a:avLst/>
+          </a:prstGeom>
+          <a:noFill/>
+        </p:spPr>
+        <p:txBody>
+          <a:bodyPr wrap="square">
+            <a:spAutoFit/>
+          </a:bodyPr>
+          <a:lstStyle/>
+          <a:p>
+            <a:pPr>
+              <a:spcAft>
+                <a:spcPts val="300"/>
+              </a:spcAft>
+            </a:pPr>
+            <a:r>
+              <a:rPr sz="1900" b="1" i="0">
+                <a:solidFill>
+                  <a:srgbClr val="1A1A1A"/>
+                </a:solidFill>
+                <a:latin typeface="Arial"/>
+              </a:rPr>
+              <a:t>The horizon</a:t>
+            </a:r>
+          </a:p>
+          <a:p>
+            <a:pPr>
+              <a:spcAft>
+                <a:spcPts val="300"/>
+              </a:spcAft>
+            </a:pPr>
+            <a:r>
+              <a:rPr sz="1550" b="0" i="0">
+                <a:solidFill>
+                  <a:srgbClr val="595959"/>
+                </a:solidFill>
+                <a:latin typeface="Arial"/>
+              </a:rPr>
+              <a:t>Six months to a roadmap, then a sustained practice.</a:t>
+            </a:r>
+          </a:p>
+        </p:txBody>
+      </p:sp>
+      <p:sp>
+        <p:nvSpPr>
+          <p:cNvPr id="15" name="TextBox 14"/>
+          <p:cNvSpPr txBox="1"/>
+          <p:nvPr/>
+        </p:nvSpPr>
+        <p:spPr>
+          <a:xfrm>
+            <a:off x="658368" y="5870448"/>
+            <a:ext cx="10881360" cy="548640"/>
+          </a:xfrm>
+          <a:prstGeom prst="rect">
+            <a:avLst/>
+          </a:prstGeom>
+          <a:noFill/>
+        </p:spPr>
+        <p:txBody>
+          <a:bodyPr wrap="square">
+            <a:spAutoFit/>
+          </a:bodyPr>
+          <a:lstStyle/>
+          <a:p>
+            <a:r>
+              <a:rPr sz="1550" b="1" i="0">
+                <a:solidFill>
+                  <a:srgbClr val="006E96"/>
+                </a:solidFill>
+                <a:latin typeface="Arial"/>
+              </a:rPr>
+              <a:t>Saving, proof, ask, horizon — a request the minister can defend in cabinet.</a:t>
+            </a:r>
+          </a:p>
+        </p:txBody>
+      </p:sp>
+      <p:sp>
+        <p:nvSpPr>
+          <p:cNvPr id="16" name="TextBox 15"/>
+          <p:cNvSpPr txBox="1"/>
+          <p:nvPr/>
+        </p:nvSpPr>
+        <p:spPr>
+          <a:xfrm>
+            <a:off x="457200" y="6473952"/>
+            <a:ext cx="7772400" cy="292608"/>
+          </a:xfrm>
+          <a:prstGeom prst="rect">
+            <a:avLst/>
+          </a:prstGeom>
+          <a:noFill/>
+        </p:spPr>
+        <p:txBody>
+          <a:bodyPr wrap="square">
+            <a:spAutoFit/>
+          </a:bodyPr>
+          <a:lstStyle/>
+          <a:p>
+            <a:r>
+              <a:rPr sz="900" b="0" i="0">
+                <a:solidFill>
+                  <a:srgbClr val="595959"/>
+                </a:solidFill>
+                <a:latin typeface="Arial"/>
+              </a:rPr>
+              <a:t>5.4 · Win the commitment — the business case that gets your minister to yes</a:t>
+            </a:r>
+          </a:p>
+        </p:txBody>
+      </p:sp>
+    </p:spTree>
+  </p:cSld>
+  <p:clrMapOvr>
+    <a:masterClrMapping/>
+  </p:clrMapOvr>
+</p:sld>
+</file>
+
+<file path=ppt/slides/slide32.xml><?xml version="1.0" encoding="utf-8"?>
+<p:sld xmlns:a="http://schemas.openxmlformats.org/drawingml/2006/main" xmlns:p="http://schemas.openxmlformats.org/presentationml/2006/main" xmlns:r="http://schemas.openxmlformats.org/officeDocument/2006/relationships">
+  <p:cSld>
+    <p:spTree>
+      <p:nvGrpSpPr>
+        <p:cNvPr id="1" name=""/>
+        <p:cNvGrpSpPr/>
+        <p:nvPr/>
+      </p:nvGrpSpPr>
+      <p:grpSpPr/>
+      <p:sp>
+        <p:nvSpPr>
           <p:cNvPr id="2" name="TextBox 1"/>
           <p:cNvSpPr txBox="1"/>
           <p:nvPr/>
@@ -14303,7 +13781,7 @@
 </p:sld>
 </file>
 
-<file path=ppt/slides/slide29.xml><?xml version="1.0" encoding="utf-8"?>
+<file path=ppt/slides/slide33.xml><?xml version="1.0" encoding="utf-8"?>
 <p:sld xmlns:a="http://schemas.openxmlformats.org/drawingml/2006/main" xmlns:p="http://schemas.openxmlformats.org/presentationml/2006/main" xmlns:r="http://schemas.openxmlformats.org/officeDocument/2006/relationships">
   <p:cSld>
     <p:spTree>

--- a/10-Knowledge-Products/KP1-GEA/videos/module_5/en/decks/KP1_M5_5.4_Deck_v0.2.pptx
+++ b/10-Knowledge-Products/KP1-GEA/videos/module_5/en/decks/KP1_M5_5.4_Deck_v0.2.pptx
@@ -11777,7 +11777,7 @@
                 </a:solidFill>
                 <a:latin typeface="Arial"/>
               </a:rPr>
-              <a:t>~4 minutes · standalone video · voice-over on text slides</a:t>
+              <a:t>standalone video · voice-over on text slides</a:t>
             </a:r>
           </a:p>
         </p:txBody>

--- a/10-Knowledge-Products/KP1-GEA/videos/module_5/en/decks/KP1_M5_5.4_Deck_v0.2.pptx
+++ b/10-Knowledge-Products/KP1-GEA/videos/module_5/en/decks/KP1_M5_5.4_Deck_v0.2.pptx
@@ -11641,7 +11641,7 @@
                 </a:solidFill>
                 <a:latin typeface="Arial"/>
               </a:rPr>
-              <a:t>KP1 · MODULE 5 · VIDEO 5.4</a:t>
+              <a:t>MODULE 5 · VIDEO 5.4</a:t>
             </a:r>
           </a:p>
         </p:txBody>
